--- a/ppt/public-transit-fleet-monitoring.pptx
+++ b/ppt/public-transit-fleet-monitoring.pptx
@@ -3095,49 +3095,14 @@
       <p:grpSpPr/>
       <p:sp>
         <p:nvSpPr>
-          <p:cNvPr id="2" name="TextBox 1"/>
-          <p:cNvSpPr txBox="1"/>
+          <p:cNvPr id="2" name="Rectangle 1"/>
+          <p:cNvSpPr/>
           <p:nvPr/>
         </p:nvSpPr>
         <p:spPr>
           <a:xfrm>
-            <a:off x="731520" y="2286000"/>
-            <a:ext cx="10698480" cy="1371600"/>
-          </a:xfrm>
-          <a:prstGeom prst="rect">
-            <a:avLst/>
-          </a:prstGeom>
-          <a:noFill/>
-        </p:spPr>
-        <p:txBody>
-          <a:bodyPr wrap="square" anchor="t">
-            <a:spAutoFit/>
-          </a:bodyPr>
-          <a:lstStyle/>
-          <a:p>
-            <a:pPr algn="ctr"/>
-            <a:r>
-              <a:rPr sz="3100" b="1">
-                <a:solidFill>
-                  <a:srgbClr val="285E9A"/>
-                </a:solidFill>
-                <a:latin typeface="Corbel"/>
-              </a:rPr>
-              <a:t>Public Transit Fleet Monitoring</a:t>
-            </a:r>
-          </a:p>
-        </p:txBody>
-      </p:sp>
-      <p:sp>
-        <p:nvSpPr>
-          <p:cNvPr id="3" name="Rectangle 2"/>
-          <p:cNvSpPr/>
-          <p:nvPr/>
-        </p:nvSpPr>
-        <p:spPr>
-          <a:xfrm>
-            <a:off x="4727448" y="3657600"/>
-            <a:ext cx="2743200" cy="45720"/>
+            <a:off x="-91440" y="-91440"/>
+            <a:ext cx="12435840" cy="7040880"/>
           </a:xfrm>
           <a:prstGeom prst="rect">
             <a:avLst/>
@@ -3174,14 +3139,14 @@
       </p:sp>
       <p:sp>
         <p:nvSpPr>
-          <p:cNvPr id="4" name="TextBox 3"/>
+          <p:cNvPr id="3" name="TextBox 2"/>
           <p:cNvSpPr txBox="1"/>
           <p:nvPr/>
         </p:nvSpPr>
         <p:spPr>
           <a:xfrm>
-            <a:off x="731520" y="3886200"/>
-            <a:ext cx="10698480" cy="2011680"/>
+            <a:off x="5852160" y="91440"/>
+            <a:ext cx="6583680" cy="4572000"/>
           </a:xfrm>
           <a:prstGeom prst="rect">
             <a:avLst/>
@@ -3194,35 +3159,160 @@
           </a:bodyPr>
           <a:lstStyle/>
           <a:p>
+            <a:pPr algn="r"/>
+            <a:r>
+              <a:rPr sz="34000" b="1" i="0">
+                <a:solidFill>
+                  <a:srgbClr val="4674A8"/>
+                </a:solidFill>
+                <a:latin typeface="Corbel"/>
+              </a:rPr>
+              <a:t>PT</a:t>
+            </a:r>
+          </a:p>
+        </p:txBody>
+      </p:sp>
+      <p:sp>
+        <p:nvSpPr>
+          <p:cNvPr id="4" name="Rectangle 3"/>
+          <p:cNvSpPr/>
+          <p:nvPr/>
+        </p:nvSpPr>
+        <p:spPr>
+          <a:xfrm>
+            <a:off x="822960" y="2148840"/>
+            <a:ext cx="1554480" cy="82296"/>
+          </a:xfrm>
+          <a:prstGeom prst="rect">
+            <a:avLst/>
+          </a:prstGeom>
+          <a:solidFill>
+            <a:srgbClr val="FFFFFF"/>
+          </a:solidFill>
+          <a:ln>
+            <a:noFill/>
+          </a:ln>
+          <a:effectLst/>
+        </p:spPr>
+        <p:style>
+          <a:lnRef idx="1">
+            <a:schemeClr val="accent1"/>
+          </a:lnRef>
+          <a:fillRef idx="3">
+            <a:schemeClr val="accent1"/>
+          </a:fillRef>
+          <a:effectRef idx="2">
+            <a:schemeClr val="accent1"/>
+          </a:effectRef>
+          <a:fontRef idx="minor">
+            <a:schemeClr val="lt1"/>
+          </a:fontRef>
+        </p:style>
+        <p:txBody>
+          <a:bodyPr rtlCol="0" anchor="ctr"/>
+          <a:lstStyle/>
+          <a:p>
             <a:pPr algn="ctr"/>
-            <a:r>
-              <a:rPr sz="1800" b="0">
-                <a:solidFill>
-                  <a:srgbClr val="5C655F"/>
+          </a:p>
+        </p:txBody>
+      </p:sp>
+      <p:sp>
+        <p:nvSpPr>
+          <p:cNvPr id="5" name="TextBox 4"/>
+          <p:cNvSpPr txBox="1"/>
+          <p:nvPr/>
+        </p:nvSpPr>
+        <p:spPr>
+          <a:xfrm>
+            <a:off x="777240" y="2377440"/>
+            <a:ext cx="7498079" cy="2103120"/>
+          </a:xfrm>
+          <a:prstGeom prst="rect">
+            <a:avLst/>
+          </a:prstGeom>
+          <a:noFill/>
+        </p:spPr>
+        <p:txBody>
+          <a:bodyPr wrap="square" anchor="t">
+            <a:spAutoFit/>
+          </a:bodyPr>
+          <a:lstStyle/>
+          <a:p>
+            <a:pPr algn="l"/>
+            <a:r>
+              <a:rPr sz="3400" b="1" i="0">
+                <a:solidFill>
+                  <a:srgbClr val="FFFFFF"/>
+                </a:solidFill>
+                <a:latin typeface="Corbel"/>
+              </a:rPr>
+              <a:t>Public Transit Fleet Monitoring</a:t>
+            </a:r>
+          </a:p>
+        </p:txBody>
+      </p:sp>
+      <p:sp>
+        <p:nvSpPr>
+          <p:cNvPr id="6" name="TextBox 5"/>
+          <p:cNvSpPr txBox="1"/>
+          <p:nvPr/>
+        </p:nvSpPr>
+        <p:spPr>
+          <a:xfrm>
+            <a:off x="822960" y="4160520"/>
+            <a:ext cx="7315200" cy="640080"/>
+          </a:xfrm>
+          <a:prstGeom prst="rect">
+            <a:avLst/>
+          </a:prstGeom>
+          <a:noFill/>
+        </p:spPr>
+        <p:txBody>
+          <a:bodyPr wrap="square" anchor="t">
+            <a:spAutoFit/>
+          </a:bodyPr>
+          <a:lstStyle/>
+          <a:p>
+            <a:pPr algn="l"/>
+            <a:r>
+              <a:rPr sz="1700" b="0" i="1">
+                <a:solidFill>
+                  <a:srgbClr val="CFDBE8"/>
                 </a:solidFill>
                 <a:latin typeface="Verdana"/>
               </a:rPr>
               <a:t>Real-time bus telemetry from two depots, aggregated at the edge, stored serverlessly</a:t>
             </a:r>
           </a:p>
-          <a:p>
-            <a:pPr algn="ctr"/>
-            <a:r>
-              <a:rPr sz="1600" b="1">
-                <a:solidFill>
-                  <a:srgbClr val="232A26"/>
-                </a:solidFill>
-                <a:latin typeface="Verdana"/>
-              </a:rPr>
-              <a:t/>
-            </a:r>
-          </a:p>
-          <a:p>
-            <a:pPr algn="ctr"/>
-            <a:r>
-              <a:rPr sz="1300" b="0">
-                <a:solidFill>
-                  <a:srgbClr val="5C655F"/>
+        </p:txBody>
+      </p:sp>
+      <p:sp>
+        <p:nvSpPr>
+          <p:cNvPr id="7" name="TextBox 6"/>
+          <p:cNvSpPr txBox="1"/>
+          <p:nvPr/>
+        </p:nvSpPr>
+        <p:spPr>
+          <a:xfrm>
+            <a:off x="822960" y="4983480"/>
+            <a:ext cx="7863840" cy="1371600"/>
+          </a:xfrm>
+          <a:prstGeom prst="rect">
+            <a:avLst/>
+          </a:prstGeom>
+          <a:noFill/>
+        </p:spPr>
+        <p:txBody>
+          <a:bodyPr wrap="square" anchor="t">
+            <a:spAutoFit/>
+          </a:bodyPr>
+          <a:lstStyle/>
+          <a:p>
+            <a:pPr algn="l"/>
+            <a:r>
+              <a:rPr sz="1250" b="0" i="0">
+                <a:solidFill>
+                  <a:srgbClr val="BACBDE"/>
                 </a:solidFill>
                 <a:latin typeface="Verdana"/>
               </a:rPr>
@@ -3230,11 +3320,11 @@
             </a:r>
           </a:p>
           <a:p>
-            <a:pPr algn="ctr"/>
-            <a:r>
-              <a:rPr sz="1300" b="0">
-                <a:solidFill>
-                  <a:srgbClr val="5C655F"/>
+            <a:pPr algn="l"/>
+            <a:r>
+              <a:rPr sz="1250" b="0" i="0">
+                <a:solidFill>
+                  <a:srgbClr val="BACBDE"/>
                 </a:solidFill>
                 <a:latin typeface="Verdana"/>
               </a:rPr>

--- a/ppt/public-transit-fleet-monitoring.pptx
+++ b/ppt/public-transit-fleet-monitoring.pptx
@@ -3139,48 +3139,13 @@
       </p:sp>
       <p:sp>
         <p:nvSpPr>
-          <p:cNvPr id="3" name="TextBox 2"/>
-          <p:cNvSpPr txBox="1"/>
+          <p:cNvPr id="3" name="Rectangle 2"/>
+          <p:cNvSpPr/>
           <p:nvPr/>
         </p:nvSpPr>
         <p:spPr>
           <a:xfrm>
-            <a:off x="5852160" y="91440"/>
-            <a:ext cx="6583680" cy="4572000"/>
-          </a:xfrm>
-          <a:prstGeom prst="rect">
-            <a:avLst/>
-          </a:prstGeom>
-          <a:noFill/>
-        </p:spPr>
-        <p:txBody>
-          <a:bodyPr wrap="square" anchor="t">
-            <a:spAutoFit/>
-          </a:bodyPr>
-          <a:lstStyle/>
-          <a:p>
-            <a:pPr algn="r"/>
-            <a:r>
-              <a:rPr sz="34000" b="1" i="0">
-                <a:solidFill>
-                  <a:srgbClr val="4674A8"/>
-                </a:solidFill>
-                <a:latin typeface="Corbel"/>
-              </a:rPr>
-              <a:t>PT</a:t>
-            </a:r>
-          </a:p>
-        </p:txBody>
-      </p:sp>
-      <p:sp>
-        <p:nvSpPr>
-          <p:cNvPr id="4" name="Rectangle 3"/>
-          <p:cNvSpPr/>
-          <p:nvPr/>
-        </p:nvSpPr>
-        <p:spPr>
-          <a:xfrm>
-            <a:off x="822960" y="2148840"/>
+            <a:off x="9811512" y="1965960"/>
             <a:ext cx="1554480" cy="82296"/>
           </a:xfrm>
           <a:prstGeom prst="rect">
@@ -3218,14 +3183,14 @@
       </p:sp>
       <p:sp>
         <p:nvSpPr>
-          <p:cNvPr id="5" name="TextBox 4"/>
+          <p:cNvPr id="4" name="TextBox 3"/>
           <p:cNvSpPr txBox="1"/>
           <p:nvPr/>
         </p:nvSpPr>
         <p:spPr>
           <a:xfrm>
-            <a:off x="777240" y="2377440"/>
-            <a:ext cx="7498079" cy="2103120"/>
+            <a:off x="3200400" y="2194560"/>
+            <a:ext cx="8165592" cy="2103120"/>
           </a:xfrm>
           <a:prstGeom prst="rect">
             <a:avLst/>
@@ -3238,7 +3203,7 @@
           </a:bodyPr>
           <a:lstStyle/>
           <a:p>
-            <a:pPr algn="l"/>
+            <a:pPr algn="r"/>
             <a:r>
               <a:rPr sz="3400" b="1" i="0">
                 <a:solidFill>
@@ -3253,14 +3218,14 @@
       </p:sp>
       <p:sp>
         <p:nvSpPr>
-          <p:cNvPr id="6" name="TextBox 5"/>
+          <p:cNvPr id="5" name="TextBox 4"/>
           <p:cNvSpPr txBox="1"/>
           <p:nvPr/>
         </p:nvSpPr>
         <p:spPr>
           <a:xfrm>
-            <a:off x="822960" y="4160520"/>
-            <a:ext cx="7315200" cy="640080"/>
+            <a:off x="4023360" y="4069080"/>
+            <a:ext cx="7342631" cy="640080"/>
           </a:xfrm>
           <a:prstGeom prst="rect">
             <a:avLst/>
@@ -3273,7 +3238,7 @@
           </a:bodyPr>
           <a:lstStyle/>
           <a:p>
-            <a:pPr algn="l"/>
+            <a:pPr algn="r"/>
             <a:r>
               <a:rPr sz="1700" b="0" i="1">
                 <a:solidFill>
@@ -3288,14 +3253,14 @@
       </p:sp>
       <p:sp>
         <p:nvSpPr>
-          <p:cNvPr id="7" name="TextBox 6"/>
+          <p:cNvPr id="6" name="TextBox 5"/>
           <p:cNvSpPr txBox="1"/>
           <p:nvPr/>
         </p:nvSpPr>
         <p:spPr>
           <a:xfrm>
-            <a:off x="822960" y="4983480"/>
-            <a:ext cx="7863840" cy="1371600"/>
+            <a:off x="3566160" y="4892040"/>
+            <a:ext cx="7799831" cy="1371600"/>
           </a:xfrm>
           <a:prstGeom prst="rect">
             <a:avLst/>
@@ -3308,7 +3273,7 @@
           </a:bodyPr>
           <a:lstStyle/>
           <a:p>
-            <a:pPr algn="l"/>
+            <a:pPr algn="r"/>
             <a:r>
               <a:rPr sz="1250" b="0" i="0">
                 <a:solidFill>
@@ -3320,7 +3285,7 @@
             </a:r>
           </a:p>
           <a:p>
-            <a:pPr algn="l"/>
+            <a:pPr algn="r"/>
             <a:r>
               <a:rPr sz="1250" b="0" i="0">
                 <a:solidFill>

--- a/ppt/public-transit-fleet-monitoring.pptx
+++ b/ppt/public-transit-fleet-monitoring.pptx
@@ -3108,7 +3108,7 @@
             <a:avLst/>
           </a:prstGeom>
           <a:solidFill>
-            <a:srgbClr val="285E9A"/>
+            <a:srgbClr val="1F8A8F"/>
           </a:solidFill>
           <a:ln>
             <a:noFill/>
@@ -3242,7 +3242,7 @@
             <a:r>
               <a:rPr sz="1700" b="0" i="1">
                 <a:solidFill>
-                  <a:srgbClr val="CFDBE8"/>
+                  <a:srgbClr val="CDE5E6"/>
                 </a:solidFill>
                 <a:latin typeface="Verdana"/>
               </a:rPr>
@@ -3277,7 +3277,7 @@
             <a:r>
               <a:rPr sz="1250" b="0" i="0">
                 <a:solidFill>
-                  <a:srgbClr val="BACBDE"/>
+                  <a:srgbClr val="B7D9DB"/>
                 </a:solidFill>
                 <a:latin typeface="Verdana"/>
               </a:rPr>
@@ -3289,7 +3289,7 @@
             <a:r>
               <a:rPr sz="1250" b="0" i="0">
                 <a:solidFill>
-                  <a:srgbClr val="BACBDE"/>
+                  <a:srgbClr val="B7D9DB"/>
                 </a:solidFill>
                 <a:latin typeface="Verdana"/>
               </a:rPr>
@@ -3340,7 +3340,7 @@
             <a:r>
               <a:rPr b="1" sz="2700">
                 <a:solidFill>
-                  <a:srgbClr val="285E9A"/>
+                  <a:srgbClr val="1F8A8F"/>
                 </a:solidFill>
                 <a:latin typeface="Corbel"/>
               </a:rPr>
@@ -3379,7 +3379,7 @@
             <a:r>
               <a:rPr sz="1500" b="1">
                 <a:solidFill>
-                  <a:srgbClr val="285E9A"/>
+                  <a:srgbClr val="1F8A8F"/>
                 </a:solidFill>
                 <a:latin typeface="Verdana"/>
               </a:rPr>
@@ -3522,7 +3522,7 @@
             <a:avLst/>
           </a:prstGeom>
           <a:solidFill>
-            <a:srgbClr val="285E9A"/>
+            <a:srgbClr val="1F8A8F"/>
           </a:solidFill>
           <a:ln>
             <a:noFill/>
@@ -3593,7 +3593,7 @@
             <a:r>
               <a:rPr b="1" sz="2700">
                 <a:solidFill>
-                  <a:srgbClr val="285E9A"/>
+                  <a:srgbClr val="1F8A8F"/>
                 </a:solidFill>
                 <a:latin typeface="Corbel"/>
               </a:rPr>
@@ -3751,7 +3751,7 @@
             <a:r>
               <a:rPr sz="1500" b="1">
                 <a:solidFill>
-                  <a:srgbClr val="285E9A"/>
+                  <a:srgbClr val="1F8A8F"/>
                 </a:solidFill>
                 <a:latin typeface="Verdana"/>
               </a:rPr>
@@ -3775,7 +3775,7 @@
             <a:avLst/>
           </a:prstGeom>
           <a:solidFill>
-            <a:srgbClr val="285E9A"/>
+            <a:srgbClr val="1F8A8F"/>
           </a:solidFill>
           <a:ln>
             <a:noFill/>
@@ -3846,7 +3846,7 @@
             <a:r>
               <a:rPr b="1" sz="2700">
                 <a:solidFill>
-                  <a:srgbClr val="285E9A"/>
+                  <a:srgbClr val="1F8A8F"/>
                 </a:solidFill>
                 <a:latin typeface="Corbel"/>
               </a:rPr>
@@ -3885,7 +3885,7 @@
             <a:r>
               <a:rPr sz="1500" b="1">
                 <a:solidFill>
-                  <a:srgbClr val="285E9A"/>
+                  <a:srgbClr val="1F8A8F"/>
                 </a:solidFill>
                 <a:latin typeface="Verdana"/>
               </a:rPr>
@@ -3957,7 +3957,7 @@
             <a:avLst/>
           </a:prstGeom>
           <a:solidFill>
-            <a:srgbClr val="285E9A"/>
+            <a:srgbClr val="1F8A8F"/>
           </a:solidFill>
           <a:ln>
             <a:noFill/>
@@ -4052,7 +4052,7 @@
             <a:r>
               <a:rPr b="1" sz="2700">
                 <a:solidFill>
-                  <a:srgbClr val="285E9A"/>
+                  <a:srgbClr val="1F8A8F"/>
                 </a:solidFill>
                 <a:latin typeface="Corbel"/>
               </a:rPr>
@@ -4091,7 +4091,7 @@
             <a:r>
               <a:rPr sz="1500" b="1">
                 <a:solidFill>
-                  <a:srgbClr val="285E9A"/>
+                  <a:srgbClr val="1F8A8F"/>
                 </a:solidFill>
                 <a:latin typeface="Verdana"/>
               </a:rPr>
@@ -4123,7 +4123,7 @@
             <a:r>
               <a:rPr sz="1500" b="1">
                 <a:solidFill>
-                  <a:srgbClr val="285E9A"/>
+                  <a:srgbClr val="1F8A8F"/>
                 </a:solidFill>
                 <a:latin typeface="Verdana"/>
               </a:rPr>
@@ -4178,7 +4178,7 @@
             <a:r>
               <a:rPr sz="1500" b="1">
                 <a:solidFill>
-                  <a:srgbClr val="285E9A"/>
+                  <a:srgbClr val="1F8A8F"/>
                 </a:solidFill>
                 <a:latin typeface="Verdana"/>
               </a:rPr>
@@ -4234,7 +4234,7 @@
             <a:avLst/>
           </a:prstGeom>
           <a:solidFill>
-            <a:srgbClr val="285E9A"/>
+            <a:srgbClr val="1F8A8F"/>
           </a:solidFill>
           <a:ln>
             <a:noFill/>
@@ -4305,7 +4305,7 @@
             <a:r>
               <a:rPr b="1" sz="2700">
                 <a:solidFill>
-                  <a:srgbClr val="285E9A"/>
+                  <a:srgbClr val="1F8A8F"/>
                 </a:solidFill>
                 <a:latin typeface="Corbel"/>
               </a:rPr>
@@ -4399,7 +4399,7 @@
             <a:r>
               <a:rPr sz="1500" b="1">
                 <a:solidFill>
-                  <a:srgbClr val="285E9A"/>
+                  <a:srgbClr val="1F8A8F"/>
                 </a:solidFill>
                 <a:latin typeface="Verdana"/>
               </a:rPr>
@@ -4439,7 +4439,7 @@
             <a:avLst/>
           </a:prstGeom>
           <a:solidFill>
-            <a:srgbClr val="285E9A"/>
+            <a:srgbClr val="1F8A8F"/>
           </a:solidFill>
           <a:ln>
             <a:noFill/>

--- a/ppt/public-transit-fleet-monitoring.pptx
+++ b/ppt/public-transit-fleet-monitoring.pptx
@@ -3318,6 +3318,50 @@
       <p:grpSpPr/>
       <p:sp>
         <p:nvSpPr>
+          <p:cNvPr id="4" name="Rectangle 3"/>
+          <p:cNvSpPr/>
+          <p:nvPr/>
+        </p:nvSpPr>
+        <p:spPr>
+          <a:xfrm>
+            <a:off x="-45720" y="-45720"/>
+            <a:ext cx="5486400" cy="6949440"/>
+          </a:xfrm>
+          <a:prstGeom prst="rect">
+            <a:avLst/>
+          </a:prstGeom>
+          <a:solidFill>
+            <a:srgbClr val="E4F0F1"/>
+          </a:solidFill>
+          <a:ln>
+            <a:noFill/>
+          </a:ln>
+          <a:effectLst/>
+        </p:spPr>
+        <p:style>
+          <a:lnRef idx="1">
+            <a:schemeClr val="accent1"/>
+          </a:lnRef>
+          <a:fillRef idx="3">
+            <a:schemeClr val="accent1"/>
+          </a:fillRef>
+          <a:effectRef idx="2">
+            <a:schemeClr val="accent1"/>
+          </a:effectRef>
+          <a:fontRef idx="minor">
+            <a:schemeClr val="lt1"/>
+          </a:fontRef>
+        </p:style>
+        <p:txBody>
+          <a:bodyPr rtlCol="0" anchor="ctr"/>
+          <a:lstStyle/>
+          <a:p>
+            <a:pPr algn="ctr"/>
+          </a:p>
+        </p:txBody>
+      </p:sp>
+      <p:sp>
+        <p:nvSpPr>
           <p:cNvPr id="2" name="Title 1"/>
           <p:cNvSpPr>
             <a:spLocks noGrp="1"/>
@@ -3356,13 +3400,13 @@
             <a:spLocks noGrp="1"/>
           </p:cNvSpPr>
           <p:nvPr>
-            <p:ph idx="1" sz="half"/>
+            <p:ph idx="1"/>
           </p:nvPr>
         </p:nvSpPr>
         <p:spPr>
           <a:xfrm>
             <a:off x="658368" y="1481328"/>
-            <a:ext cx="5120640" cy="4846320"/>
+            <a:ext cx="10972800" cy="4846320"/>
           </a:xfrm>
         </p:spPr>
         <p:txBody>
@@ -3373,11 +3417,11 @@
           <a:p>
             <a:pPr>
               <a:spcAft>
-                <a:spcPts val="800"/>
+                <a:spcPts val="900"/>
               </a:spcAft>
             </a:pPr>
             <a:r>
-              <a:rPr sz="1500" b="1">
+              <a:rPr sz="1700" b="1">
                 <a:solidFill>
                   <a:srgbClr val="1F8A8F"/>
                 </a:solidFill>
@@ -3389,11 +3433,11 @@
           <a:p>
             <a:pPr>
               <a:spcAft>
-                <a:spcPts val="800"/>
+                <a:spcPts val="900"/>
               </a:spcAft>
             </a:pPr>
             <a:r>
-              <a:rPr sz="1500" b="0">
+              <a:rPr sz="1700" b="0">
                 <a:solidFill>
                   <a:srgbClr val="232A26"/>
                 </a:solidFill>
@@ -3405,11 +3449,11 @@
           <a:p>
             <a:pPr>
               <a:spcAft>
-                <a:spcPts val="800"/>
+                <a:spcPts val="900"/>
               </a:spcAft>
             </a:pPr>
             <a:r>
-              <a:rPr sz="1500" b="0">
+              <a:rPr sz="1700" b="0">
                 <a:solidFill>
                   <a:srgbClr val="232A26"/>
                 </a:solidFill>
@@ -3421,11 +3465,11 @@
           <a:p>
             <a:pPr>
               <a:spcAft>
-                <a:spcPts val="800"/>
+                <a:spcPts val="900"/>
               </a:spcAft>
             </a:pPr>
             <a:r>
-              <a:rPr sz="1500" b="0">
+              <a:rPr sz="1700" b="0">
                 <a:solidFill>
                   <a:srgbClr val="232A26"/>
                 </a:solidFill>
@@ -3434,37 +3478,14 @@
               <a:t>Too much to watch by hand: five metrics per depot across two depots is ten continuous telemetry streams, far more than staff can reliably eyeball.</a:t>
             </a:r>
           </a:p>
-        </p:txBody>
-      </p:sp>
-      <p:sp>
-        <p:nvSpPr>
-          <p:cNvPr id="4" name="Content Placeholder 3"/>
-          <p:cNvSpPr>
-            <a:spLocks noGrp="1"/>
-          </p:cNvSpPr>
-          <p:nvPr>
-            <p:ph idx="2" sz="half"/>
-          </p:nvPr>
-        </p:nvSpPr>
-        <p:spPr>
-          <a:xfrm>
-            <a:off x="6355080" y="1481328"/>
-            <a:ext cx="5120640" cy="4846320"/>
-          </a:xfrm>
-        </p:spPr>
-        <p:txBody>
-          <a:bodyPr wrap="square">
-            <a:normAutofit/>
-          </a:bodyPr>
-          <a:lstStyle/>
           <a:p>
             <a:pPr>
               <a:spcAft>
-                <a:spcPts val="800"/>
+                <a:spcPts val="900"/>
               </a:spcAft>
             </a:pPr>
             <a:r>
-              <a:rPr sz="1500" b="0">
+              <a:rPr sz="1700" b="0">
                 <a:solidFill>
                   <a:srgbClr val="232A26"/>
                 </a:solidFill>
@@ -3476,11 +3497,11 @@
           <a:p>
             <a:pPr>
               <a:spcAft>
-                <a:spcPts val="800"/>
+                <a:spcPts val="900"/>
               </a:spcAft>
             </a:pPr>
             <a:r>
-              <a:rPr sz="1500" b="0">
+              <a:rPr sz="1700" b="0">
                 <a:solidFill>
                   <a:srgbClr val="232A26"/>
                 </a:solidFill>
@@ -3492,11 +3513,11 @@
           <a:p>
             <a:pPr>
               <a:spcAft>
-                <a:spcPts val="800"/>
+                <a:spcPts val="900"/>
               </a:spcAft>
             </a:pPr>
             <a:r>
-              <a:rPr sz="1500" b="0">
+              <a:rPr sz="1700" b="0">
                 <a:solidFill>
                   <a:srgbClr val="232A26"/>
                 </a:solidFill>
@@ -3571,6 +3592,50 @@
       <p:grpSpPr/>
       <p:sp>
         <p:nvSpPr>
+          <p:cNvPr id="4" name="Rectangle 3"/>
+          <p:cNvSpPr/>
+          <p:nvPr/>
+        </p:nvSpPr>
+        <p:spPr>
+          <a:xfrm>
+            <a:off x="-45720" y="-45720"/>
+            <a:ext cx="5486400" cy="6949440"/>
+          </a:xfrm>
+          <a:prstGeom prst="rect">
+            <a:avLst/>
+          </a:prstGeom>
+          <a:solidFill>
+            <a:srgbClr val="E4F0F1"/>
+          </a:solidFill>
+          <a:ln>
+            <a:noFill/>
+          </a:ln>
+          <a:effectLst/>
+        </p:spPr>
+        <p:style>
+          <a:lnRef idx="1">
+            <a:schemeClr val="accent1"/>
+          </a:lnRef>
+          <a:fillRef idx="3">
+            <a:schemeClr val="accent1"/>
+          </a:fillRef>
+          <a:effectRef idx="2">
+            <a:schemeClr val="accent1"/>
+          </a:effectRef>
+          <a:fontRef idx="minor">
+            <a:schemeClr val="lt1"/>
+          </a:fontRef>
+        </p:style>
+        <p:txBody>
+          <a:bodyPr rtlCol="0" anchor="ctr"/>
+          <a:lstStyle/>
+          <a:p>
+            <a:pPr algn="ctr"/>
+          </a:p>
+        </p:txBody>
+      </p:sp>
+      <p:sp>
+        <p:nvSpPr>
           <p:cNvPr id="2" name="Title 1"/>
           <p:cNvSpPr>
             <a:spLocks noGrp="1"/>
@@ -3609,13 +3674,13 @@
             <a:spLocks noGrp="1"/>
           </p:cNvSpPr>
           <p:nvPr>
-            <p:ph idx="1" sz="half"/>
+            <p:ph idx="1"/>
           </p:nvPr>
         </p:nvSpPr>
         <p:spPr>
           <a:xfrm>
             <a:off x="658368" y="1481328"/>
-            <a:ext cx="5120640" cy="4846320"/>
+            <a:ext cx="10972800" cy="4846320"/>
           </a:xfrm>
         </p:spPr>
         <p:txBody>
@@ -3626,11 +3691,11 @@
           <a:p>
             <a:pPr>
               <a:spcAft>
-                <a:spcPts val="800"/>
+                <a:spcPts val="900"/>
               </a:spcAft>
             </a:pPr>
             <a:r>
-              <a:rPr sz="1500" b="0">
+              <a:rPr sz="1700" b="0">
                 <a:solidFill>
                   <a:srgbClr val="232A26"/>
                 </a:solidFill>
@@ -3642,11 +3707,11 @@
           <a:p>
             <a:pPr>
               <a:spcAft>
-                <a:spcPts val="800"/>
+                <a:spcPts val="900"/>
               </a:spcAft>
             </a:pPr>
             <a:r>
-              <a:rPr sz="1500" b="0">
+              <a:rPr sz="1700" b="0">
                 <a:solidFill>
                   <a:srgbClr val="232A26"/>
                 </a:solidFill>
@@ -3658,11 +3723,11 @@
           <a:p>
             <a:pPr>
               <a:spcAft>
-                <a:spcPts val="800"/>
+                <a:spcPts val="900"/>
               </a:spcAft>
             </a:pPr>
             <a:r>
-              <a:rPr sz="1500" b="0">
+              <a:rPr sz="1700" b="0">
                 <a:solidFill>
                   <a:srgbClr val="232A26"/>
                 </a:solidFill>
@@ -3674,11 +3739,11 @@
           <a:p>
             <a:pPr>
               <a:spcAft>
-                <a:spcPts val="800"/>
+                <a:spcPts val="900"/>
               </a:spcAft>
             </a:pPr>
             <a:r>
-              <a:rPr sz="1500" b="0">
+              <a:rPr sz="1700" b="0">
                 <a:solidFill>
                   <a:srgbClr val="232A26"/>
                 </a:solidFill>
@@ -3687,37 +3752,14 @@
               <a:t>AWS Lambda: serverless ingest that consumes the queue and batch-writes records.</a:t>
             </a:r>
           </a:p>
-        </p:txBody>
-      </p:sp>
-      <p:sp>
-        <p:nvSpPr>
-          <p:cNvPr id="4" name="Content Placeholder 3"/>
-          <p:cNvSpPr>
-            <a:spLocks noGrp="1"/>
-          </p:cNvSpPr>
-          <p:nvPr>
-            <p:ph idx="2" sz="half"/>
-          </p:nvPr>
-        </p:nvSpPr>
-        <p:spPr>
-          <a:xfrm>
-            <a:off x="6355080" y="1481328"/>
-            <a:ext cx="5120640" cy="4846320"/>
-          </a:xfrm>
-        </p:spPr>
-        <p:txBody>
-          <a:bodyPr wrap="square">
-            <a:normAutofit/>
-          </a:bodyPr>
-          <a:lstStyle/>
           <a:p>
             <a:pPr>
               <a:spcAft>
-                <a:spcPts val="800"/>
+                <a:spcPts val="900"/>
               </a:spcAft>
             </a:pPr>
             <a:r>
-              <a:rPr sz="1500" b="0">
+              <a:rPr sz="1700" b="0">
                 <a:solidFill>
                   <a:srgbClr val="232A26"/>
                 </a:solidFill>
@@ -3729,11 +3771,11 @@
           <a:p>
             <a:pPr>
               <a:spcAft>
-                <a:spcPts val="800"/>
+                <a:spcPts val="900"/>
               </a:spcAft>
             </a:pPr>
             <a:r>
-              <a:rPr sz="1500" b="0">
+              <a:rPr sz="1700" b="0">
                 <a:solidFill>
                   <a:srgbClr val="232A26"/>
                 </a:solidFill>
@@ -3745,11 +3787,11 @@
           <a:p>
             <a:pPr>
               <a:spcAft>
-                <a:spcPts val="800"/>
+                <a:spcPts val="900"/>
               </a:spcAft>
             </a:pPr>
             <a:r>
-              <a:rPr sz="1500" b="1">
+              <a:rPr sz="1700" b="1">
                 <a:solidFill>
                   <a:srgbClr val="1F8A8F"/>
                 </a:solidFill>
@@ -3824,6 +3866,50 @@
       <p:grpSpPr/>
       <p:sp>
         <p:nvSpPr>
+          <p:cNvPr id="4" name="Rectangle 3"/>
+          <p:cNvSpPr/>
+          <p:nvPr/>
+        </p:nvSpPr>
+        <p:spPr>
+          <a:xfrm>
+            <a:off x="-45720" y="-45720"/>
+            <a:ext cx="5486400" cy="6949440"/>
+          </a:xfrm>
+          <a:prstGeom prst="rect">
+            <a:avLst/>
+          </a:prstGeom>
+          <a:solidFill>
+            <a:srgbClr val="E4F0F1"/>
+          </a:solidFill>
+          <a:ln>
+            <a:noFill/>
+          </a:ln>
+          <a:effectLst/>
+        </p:spPr>
+        <p:style>
+          <a:lnRef idx="1">
+            <a:schemeClr val="accent1"/>
+          </a:lnRef>
+          <a:fillRef idx="3">
+            <a:schemeClr val="accent1"/>
+          </a:fillRef>
+          <a:effectRef idx="2">
+            <a:schemeClr val="accent1"/>
+          </a:effectRef>
+          <a:fontRef idx="minor">
+            <a:schemeClr val="lt1"/>
+          </a:fontRef>
+        </p:style>
+        <p:txBody>
+          <a:bodyPr rtlCol="0" anchor="ctr"/>
+          <a:lstStyle/>
+          <a:p>
+            <a:pPr algn="ctr"/>
+          </a:p>
+        </p:txBody>
+      </p:sp>
+      <p:sp>
+        <p:nvSpPr>
           <p:cNvPr id="2" name="Title 1"/>
           <p:cNvSpPr>
             <a:spLocks noGrp="1"/>
@@ -3868,7 +3954,7 @@
         <p:spPr>
           <a:xfrm>
             <a:off x="658368" y="1481328"/>
-            <a:ext cx="5760720" cy="4754880"/>
+            <a:ext cx="4663440" cy="4754880"/>
           </a:xfrm>
         </p:spPr>
         <p:txBody>
@@ -3944,7 +4030,7 @@
       </p:sp>
       <p:sp>
         <p:nvSpPr>
-          <p:cNvPr id="4" name="Rectangle 3"/>
+          <p:cNvPr id="5" name="Rectangle 4"/>
           <p:cNvSpPr/>
           <p:nvPr/>
         </p:nvSpPr>
@@ -3988,7 +4074,7 @@
       </p:sp>
       <p:pic>
         <p:nvPicPr>
-          <p:cNvPr id="5" name="Picture 4" descr="dashboard-desktop.png"/>
+          <p:cNvPr id="6" name="Picture 5" descr="dashboard-desktop.png"/>
           <p:cNvPicPr>
             <a:picLocks noChangeAspect="1"/>
           </p:cNvPicPr>
@@ -4002,7 +4088,7 @@
         </p:blipFill>
         <p:spPr>
           <a:xfrm>
-            <a:off x="6898349" y="1517904"/>
+            <a:off x="6486869" y="1517904"/>
             <a:ext cx="4582740" cy="4572000"/>
           </a:xfrm>
           <a:prstGeom prst="rect">
@@ -4030,6 +4116,50 @@
       <p:grpSpPr/>
       <p:sp>
         <p:nvSpPr>
+          <p:cNvPr id="4" name="Rectangle 3"/>
+          <p:cNvSpPr/>
+          <p:nvPr/>
+        </p:nvSpPr>
+        <p:spPr>
+          <a:xfrm>
+            <a:off x="-45720" y="-45720"/>
+            <a:ext cx="5486400" cy="6949440"/>
+          </a:xfrm>
+          <a:prstGeom prst="rect">
+            <a:avLst/>
+          </a:prstGeom>
+          <a:solidFill>
+            <a:srgbClr val="E4F0F1"/>
+          </a:solidFill>
+          <a:ln>
+            <a:noFill/>
+          </a:ln>
+          <a:effectLst/>
+        </p:spPr>
+        <p:style>
+          <a:lnRef idx="1">
+            <a:schemeClr val="accent1"/>
+          </a:lnRef>
+          <a:fillRef idx="3">
+            <a:schemeClr val="accent1"/>
+          </a:fillRef>
+          <a:effectRef idx="2">
+            <a:schemeClr val="accent1"/>
+          </a:effectRef>
+          <a:fontRef idx="minor">
+            <a:schemeClr val="lt1"/>
+          </a:fontRef>
+        </p:style>
+        <p:txBody>
+          <a:bodyPr rtlCol="0" anchor="ctr"/>
+          <a:lstStyle/>
+          <a:p>
+            <a:pPr algn="ctr"/>
+          </a:p>
+        </p:txBody>
+      </p:sp>
+      <p:sp>
+        <p:nvSpPr>
           <p:cNvPr id="2" name="Title 1"/>
           <p:cNvSpPr>
             <a:spLocks noGrp="1"/>
@@ -4068,13 +4198,13 @@
             <a:spLocks noGrp="1"/>
           </p:cNvSpPr>
           <p:nvPr>
-            <p:ph idx="1" sz="half"/>
+            <p:ph idx="1"/>
           </p:nvPr>
         </p:nvSpPr>
         <p:spPr>
           <a:xfrm>
             <a:off x="658368" y="1481328"/>
-            <a:ext cx="5120640" cy="4846320"/>
+            <a:ext cx="10972800" cy="4846320"/>
           </a:xfrm>
         </p:spPr>
         <p:txBody>
@@ -4085,11 +4215,11 @@
           <a:p>
             <a:pPr>
               <a:spcAft>
-                <a:spcPts val="800"/>
+                <a:spcPts val="900"/>
               </a:spcAft>
             </a:pPr>
             <a:r>
-              <a:rPr sz="1500" b="1">
+              <a:rPr sz="1700" b="1">
                 <a:solidFill>
                   <a:srgbClr val="1F8A8F"/>
                 </a:solidFill>
@@ -4101,11 +4231,11 @@
           <a:p>
             <a:pPr lvl="1">
               <a:spcAft>
-                <a:spcPts val="800"/>
+                <a:spcPts val="900"/>
               </a:spcAft>
             </a:pPr>
             <a:r>
-              <a:rPr sz="1300" b="0">
+              <a:rPr sz="1500" b="0">
                 <a:solidFill>
                   <a:srgbClr val="232A26"/>
                 </a:solidFill>
@@ -4117,11 +4247,11 @@
           <a:p>
             <a:pPr>
               <a:spcAft>
-                <a:spcPts val="800"/>
+                <a:spcPts val="900"/>
               </a:spcAft>
             </a:pPr>
             <a:r>
-              <a:rPr sz="1500" b="1">
+              <a:rPr sz="1700" b="1">
                 <a:solidFill>
                   <a:srgbClr val="1F8A8F"/>
                 </a:solidFill>
@@ -4133,11 +4263,11 @@
           <a:p>
             <a:pPr lvl="1">
               <a:spcAft>
-                <a:spcPts val="800"/>
+                <a:spcPts val="900"/>
               </a:spcAft>
             </a:pPr>
             <a:r>
-              <a:rPr sz="1300" b="0">
+              <a:rPr sz="1500" b="0">
                 <a:solidFill>
                   <a:srgbClr val="232A26"/>
                 </a:solidFill>
@@ -4146,37 +4276,14 @@
               <a:t>A reading dropped in the race does not crash anything; the fleet averages are just silently wrong. And locking every insert fixes the race only by making ten senders queue behind each other.</a:t>
             </a:r>
           </a:p>
-        </p:txBody>
-      </p:sp>
-      <p:sp>
-        <p:nvSpPr>
-          <p:cNvPr id="4" name="Content Placeholder 3"/>
-          <p:cNvSpPr>
-            <a:spLocks noGrp="1"/>
-          </p:cNvSpPr>
-          <p:nvPr>
-            <p:ph idx="2" sz="half"/>
-          </p:nvPr>
-        </p:nvSpPr>
-        <p:spPr>
-          <a:xfrm>
-            <a:off x="6355080" y="1481328"/>
-            <a:ext cx="5120640" cy="4846320"/>
-          </a:xfrm>
-        </p:spPr>
-        <p:txBody>
-          <a:bodyPr wrap="square">
-            <a:normAutofit/>
-          </a:bodyPr>
-          <a:lstStyle/>
           <a:p>
             <a:pPr>
               <a:spcAft>
-                <a:spcPts val="800"/>
+                <a:spcPts val="900"/>
               </a:spcAft>
             </a:pPr>
             <a:r>
-              <a:rPr sz="1500" b="1">
+              <a:rPr sz="1700" b="1">
                 <a:solidFill>
                   <a:srgbClr val="1F8A8F"/>
                 </a:solidFill>
@@ -4188,11 +4295,11 @@
           <a:p>
             <a:pPr lvl="1">
               <a:spcAft>
-                <a:spcPts val="800"/>
+                <a:spcPts val="900"/>
               </a:spcAft>
             </a:pPr>
             <a:r>
-              <a:rPr sz="1300" b="0">
+              <a:rPr sz="1500" b="0">
                 <a:solidFill>
                   <a:srgbClr val="232A26"/>
                 </a:solidFill>
@@ -4204,11 +4311,11 @@
           <a:p>
             <a:pPr>
               <a:spcAft>
-                <a:spcPts val="800"/>
+                <a:spcPts val="900"/>
               </a:spcAft>
             </a:pPr>
             <a:r>
-              <a:rPr sz="1500" b="0">
+              <a:rPr sz="1700" b="0">
                 <a:solidFill>
                   <a:srgbClr val="232A26"/>
                 </a:solidFill>
@@ -4283,6 +4390,50 @@
       <p:grpSpPr/>
       <p:sp>
         <p:nvSpPr>
+          <p:cNvPr id="4" name="Rectangle 3"/>
+          <p:cNvSpPr/>
+          <p:nvPr/>
+        </p:nvSpPr>
+        <p:spPr>
+          <a:xfrm>
+            <a:off x="-45720" y="-45720"/>
+            <a:ext cx="5486400" cy="6949440"/>
+          </a:xfrm>
+          <a:prstGeom prst="rect">
+            <a:avLst/>
+          </a:prstGeom>
+          <a:solidFill>
+            <a:srgbClr val="E4F0F1"/>
+          </a:solidFill>
+          <a:ln>
+            <a:noFill/>
+          </a:ln>
+          <a:effectLst/>
+        </p:spPr>
+        <p:style>
+          <a:lnRef idx="1">
+            <a:schemeClr val="accent1"/>
+          </a:lnRef>
+          <a:fillRef idx="3">
+            <a:schemeClr val="accent1"/>
+          </a:fillRef>
+          <a:effectRef idx="2">
+            <a:schemeClr val="accent1"/>
+          </a:effectRef>
+          <a:fontRef idx="minor">
+            <a:schemeClr val="lt1"/>
+          </a:fontRef>
+        </p:style>
+        <p:txBody>
+          <a:bodyPr rtlCol="0" anchor="ctr"/>
+          <a:lstStyle/>
+          <a:p>
+            <a:pPr algn="ctr"/>
+          </a:p>
+        </p:txBody>
+      </p:sp>
+      <p:sp>
+        <p:nvSpPr>
           <p:cNvPr id="2" name="Title 1"/>
           <p:cNvSpPr>
             <a:spLocks noGrp="1"/>
@@ -4321,13 +4472,13 @@
             <a:spLocks noGrp="1"/>
           </p:cNvSpPr>
           <p:nvPr>
-            <p:ph idx="1" sz="half"/>
+            <p:ph idx="1"/>
           </p:nvPr>
         </p:nvSpPr>
         <p:spPr>
           <a:xfrm>
             <a:off x="658368" y="1481328"/>
-            <a:ext cx="5120640" cy="4846320"/>
+            <a:ext cx="10972800" cy="4846320"/>
           </a:xfrm>
         </p:spPr>
         <p:txBody>
@@ -4338,11 +4489,11 @@
           <a:p>
             <a:pPr>
               <a:spcAft>
-                <a:spcPts val="800"/>
+                <a:spcPts val="900"/>
               </a:spcAft>
             </a:pPr>
             <a:r>
-              <a:rPr sz="1500" b="0">
+              <a:rPr sz="1700" b="0">
                 <a:solidFill>
                   <a:srgbClr val="232A26"/>
                 </a:solidFill>
@@ -4354,11 +4505,11 @@
           <a:p>
             <a:pPr>
               <a:spcAft>
-                <a:spcPts val="800"/>
+                <a:spcPts val="900"/>
               </a:spcAft>
             </a:pPr>
             <a:r>
-              <a:rPr sz="1500" b="0">
+              <a:rPr sz="1700" b="0">
                 <a:solidFill>
                   <a:srgbClr val="232A26"/>
                 </a:solidFill>
@@ -4367,37 +4518,14 @@
               <a:t>Serverless where it scales: Amazon SQS, AWS Lambda and DynamoDB absorb the fleet's writes with no servers to size, patch or babysit.</a:t>
             </a:r>
           </a:p>
-        </p:txBody>
-      </p:sp>
-      <p:sp>
-        <p:nvSpPr>
-          <p:cNvPr id="4" name="Content Placeholder 3"/>
-          <p:cNvSpPr>
-            <a:spLocks noGrp="1"/>
-          </p:cNvSpPr>
-          <p:nvPr>
-            <p:ph idx="2" sz="half"/>
-          </p:nvPr>
-        </p:nvSpPr>
-        <p:spPr>
-          <a:xfrm>
-            <a:off x="6355080" y="1481328"/>
-            <a:ext cx="5120640" cy="4846320"/>
-          </a:xfrm>
-        </p:spPr>
-        <p:txBody>
-          <a:bodyPr wrap="square">
-            <a:normAutofit/>
-          </a:bodyPr>
-          <a:lstStyle/>
           <a:p>
             <a:pPr>
               <a:spcAft>
-                <a:spcPts val="800"/>
+                <a:spcPts val="900"/>
               </a:spcAft>
             </a:pPr>
             <a:r>
-              <a:rPr sz="1500" b="1">
+              <a:rPr sz="1700" b="1">
                 <a:solidFill>
                   <a:srgbClr val="1F8A8F"/>
                 </a:solidFill>
@@ -4409,11 +4537,11 @@
           <a:p>
             <a:pPr>
               <a:spcAft>
-                <a:spcPts val="800"/>
+                <a:spcPts val="900"/>
               </a:spcAft>
             </a:pPr>
             <a:r>
-              <a:rPr sz="1500" b="0">
+              <a:rPr sz="1700" b="0">
                 <a:solidFill>
                   <a:srgbClr val="232A26"/>
                 </a:solidFill>

--- a/ppt/public-transit-fleet-monitoring.pptx
+++ b/ppt/public-transit-fleet-monitoring.pptx
@@ -3108,7 +3108,7 @@
             <a:avLst/>
           </a:prstGeom>
           <a:solidFill>
-            <a:srgbClr val="1F8A8F"/>
+            <a:srgbClr val="1F7A5A"/>
           </a:solidFill>
           <a:ln>
             <a:noFill/>
@@ -3209,7 +3209,7 @@
                 <a:solidFill>
                   <a:srgbClr val="FFFFFF"/>
                 </a:solidFill>
-                <a:latin typeface="Corbel"/>
+                <a:latin typeface="Century Gothic"/>
               </a:rPr>
               <a:t>Public Transit Fleet Monitoring</a:t>
             </a:r>
@@ -3242,9 +3242,9 @@
             <a:r>
               <a:rPr sz="1700" b="0" i="1">
                 <a:solidFill>
-                  <a:srgbClr val="CDE5E6"/>
-                </a:solidFill>
-                <a:latin typeface="Verdana"/>
+                  <a:srgbClr val="CDE1DA"/>
+                </a:solidFill>
+                <a:latin typeface="Calibri"/>
               </a:rPr>
               <a:t>Real-time bus telemetry from two depots, aggregated at the edge, stored serverlessly</a:t>
             </a:r>
@@ -3277,9 +3277,9 @@
             <a:r>
               <a:rPr sz="1250" b="0" i="0">
                 <a:solidFill>
-                  <a:srgbClr val="B7D9DB"/>
-                </a:solidFill>
-                <a:latin typeface="Verdana"/>
+                  <a:srgbClr val="B7D4CA"/>
+                </a:solidFill>
+                <a:latin typeface="Calibri"/>
               </a:rPr>
               <a:t>MSc in Cloud Computing   ·   Fog and Edge Computing (H9FECC)</a:t>
             </a:r>
@@ -3289,9 +3289,9 @@
             <a:r>
               <a:rPr sz="1250" b="0" i="0">
                 <a:solidFill>
-                  <a:srgbClr val="B7D9DB"/>
-                </a:solidFill>
-                <a:latin typeface="Verdana"/>
+                  <a:srgbClr val="B7D4CA"/>
+                </a:solidFill>
+                <a:latin typeface="Calibri"/>
               </a:rPr>
               <a:t>National College of Ireland</a:t>
             </a:r>
@@ -3318,20 +3318,188 @@
       <p:grpSpPr/>
       <p:sp>
         <p:nvSpPr>
+          <p:cNvPr id="2" name="Title 1"/>
+          <p:cNvSpPr>
+            <a:spLocks noGrp="1"/>
+          </p:cNvSpPr>
+          <p:nvPr>
+            <p:ph type="title"/>
+          </p:nvPr>
+        </p:nvSpPr>
+        <p:spPr>
+          <a:xfrm>
+            <a:off x="640080" y="411480"/>
+            <a:ext cx="10972800" cy="822960"/>
+          </a:xfrm>
+        </p:spPr>
+        <p:txBody>
+          <a:bodyPr wrap="square" anchor="t"/>
+          <a:lstStyle/>
+          <a:p>
+            <a:pPr algn="l"/>
+            <a:r>
+              <a:rPr b="1" sz="2700">
+                <a:solidFill>
+                  <a:srgbClr val="232A26"/>
+                </a:solidFill>
+                <a:latin typeface="Century Gothic"/>
+              </a:rPr>
+              <a:t>Why periodic fleet checks fail</a:t>
+            </a:r>
+          </a:p>
+        </p:txBody>
+      </p:sp>
+      <p:sp>
+        <p:nvSpPr>
+          <p:cNvPr id="3" name="Content Placeholder 2"/>
+          <p:cNvSpPr>
+            <a:spLocks noGrp="1"/>
+          </p:cNvSpPr>
+          <p:nvPr>
+            <p:ph idx="1"/>
+          </p:nvPr>
+        </p:nvSpPr>
+        <p:spPr>
+          <a:xfrm>
+            <a:off x="658368" y="1463040"/>
+            <a:ext cx="10972800" cy="4663440"/>
+          </a:xfrm>
+        </p:spPr>
+        <p:txBody>
+          <a:bodyPr wrap="square">
+            <a:normAutofit/>
+          </a:bodyPr>
+          <a:lstStyle/>
+          <a:p>
+            <a:pPr>
+              <a:spcAft>
+                <a:spcPts val="900"/>
+              </a:spcAft>
+            </a:pPr>
+            <a:r>
+              <a:rPr sz="1700" b="0">
+                <a:solidFill>
+                  <a:srgbClr val="232A26"/>
+                </a:solidFill>
+                <a:latin typeface="Calibri"/>
+              </a:rPr>
+              <a:t>A bus's condition changes minute by minute while it is on the road, but a depot inspection only sees the vehicle once it is parked.</a:t>
+            </a:r>
+          </a:p>
+          <a:p>
+            <a:pPr>
+              <a:spcAft>
+                <a:spcPts val="900"/>
+              </a:spcAft>
+            </a:pPr>
+            <a:r>
+              <a:rPr sz="1700" b="0">
+                <a:solidFill>
+                  <a:srgbClr val="232A26"/>
+                </a:solidFill>
+                <a:latin typeface="Calibri"/>
+              </a:rPr>
+              <a:t>Faults develop mid-route: engine overheating and brake wear build up during service, so by the evening walk-around the damage is hours old.</a:t>
+            </a:r>
+          </a:p>
+          <a:p>
+            <a:pPr>
+              <a:spcAft>
+                <a:spcPts val="900"/>
+              </a:spcAft>
+            </a:pPr>
+            <a:r>
+              <a:rPr sz="1700" b="0">
+                <a:solidFill>
+                  <a:srgbClr val="232A26"/>
+                </a:solidFill>
+                <a:latin typeface="Calibri"/>
+              </a:rPr>
+              <a:t>Some problems cannot wait: overcrowding and low fuel need a response now, not a line in the end-of-shift report.</a:t>
+            </a:r>
+          </a:p>
+          <a:p>
+            <a:pPr>
+              <a:spcAft>
+                <a:spcPts val="900"/>
+              </a:spcAft>
+            </a:pPr>
+            <a:r>
+              <a:rPr sz="1700" b="0">
+                <a:solidFill>
+                  <a:srgbClr val="232A26"/>
+                </a:solidFill>
+                <a:latin typeface="Calibri"/>
+              </a:rPr>
+              <a:t>Too much to watch by hand: five metrics per depot across two depots is ten continuous telemetry streams, far more than staff can reliably eyeball.</a:t>
+            </a:r>
+          </a:p>
+          <a:p>
+            <a:pPr>
+              <a:spcAft>
+                <a:spcPts val="900"/>
+              </a:spcAft>
+            </a:pPr>
+            <a:r>
+              <a:rPr sz="1700" b="0">
+                <a:solidFill>
+                  <a:srgbClr val="232A26"/>
+                </a:solidFill>
+                <a:latin typeface="Calibri"/>
+              </a:rPr>
+              <a:t>10 live telemetry streams.</a:t>
+            </a:r>
+          </a:p>
+          <a:p>
+            <a:pPr>
+              <a:spcAft>
+                <a:spcPts val="900"/>
+              </a:spcAft>
+            </a:pPr>
+            <a:r>
+              <a:rPr sz="1700" b="0">
+                <a:solidFill>
+                  <a:srgbClr val="232A26"/>
+                </a:solidFill>
+                <a:latin typeface="Calibri"/>
+              </a:rPr>
+              <a:t>4 safety alert rules at the edge.</a:t>
+            </a:r>
+          </a:p>
+          <a:p>
+            <a:pPr>
+              <a:spcAft>
+                <a:spcPts val="900"/>
+              </a:spcAft>
+            </a:pPr>
+            <a:r>
+              <a:rPr sz="1700" b="0">
+                <a:solidFill>
+                  <a:srgbClr val="232A26"/>
+                </a:solidFill>
+                <a:latin typeface="Calibri"/>
+              </a:rPr>
+              <a:t>2 depots, one shared fog gateway.</a:t>
+            </a:r>
+          </a:p>
+        </p:txBody>
+      </p:sp>
+      <p:sp>
+        <p:nvSpPr>
           <p:cNvPr id="4" name="Rectangle 3"/>
           <p:cNvSpPr/>
           <p:nvPr/>
         </p:nvSpPr>
         <p:spPr>
           <a:xfrm>
-            <a:off x="-45720" y="-45720"/>
-            <a:ext cx="5486400" cy="6949440"/>
+            <a:off x="658368" y="1207008"/>
+            <a:ext cx="10881360" cy="45720"/>
           </a:xfrm>
           <a:prstGeom prst="rect">
             <a:avLst/>
           </a:prstGeom>
           <a:solidFill>
-            <a:srgbClr val="E4F0F1"/>
+            <a:srgbClr val="1F7A5A"/>
           </a:solidFill>
           <a:ln>
             <a:noFill/>
@@ -3362,188 +3530,20 @@
       </p:sp>
       <p:sp>
         <p:nvSpPr>
-          <p:cNvPr id="2" name="Title 1"/>
-          <p:cNvSpPr>
-            <a:spLocks noGrp="1"/>
-          </p:cNvSpPr>
-          <p:nvPr>
-            <p:ph type="title"/>
-          </p:nvPr>
-        </p:nvSpPr>
-        <p:spPr>
-          <a:xfrm>
-            <a:off x="640080" y="384048"/>
-            <a:ext cx="10972800" cy="868680"/>
-          </a:xfrm>
-        </p:spPr>
-        <p:txBody>
-          <a:bodyPr wrap="square" anchor="t"/>
-          <a:lstStyle/>
-          <a:p>
-            <a:pPr algn="l"/>
-            <a:r>
-              <a:rPr b="1" sz="2700">
-                <a:solidFill>
-                  <a:srgbClr val="1F8A8F"/>
-                </a:solidFill>
-                <a:latin typeface="Corbel"/>
-              </a:rPr>
-              <a:t>Why periodic fleet checks fail</a:t>
-            </a:r>
-          </a:p>
-        </p:txBody>
-      </p:sp>
-      <p:sp>
-        <p:nvSpPr>
-          <p:cNvPr id="3" name="Content Placeholder 2"/>
-          <p:cNvSpPr>
-            <a:spLocks noGrp="1"/>
-          </p:cNvSpPr>
-          <p:nvPr>
-            <p:ph idx="1"/>
-          </p:nvPr>
-        </p:nvSpPr>
-        <p:spPr>
-          <a:xfrm>
-            <a:off x="658368" y="1481328"/>
-            <a:ext cx="10972800" cy="4846320"/>
-          </a:xfrm>
-        </p:spPr>
-        <p:txBody>
-          <a:bodyPr wrap="square">
-            <a:normAutofit/>
-          </a:bodyPr>
-          <a:lstStyle/>
-          <a:p>
-            <a:pPr>
-              <a:spcAft>
-                <a:spcPts val="900"/>
-              </a:spcAft>
-            </a:pPr>
-            <a:r>
-              <a:rPr sz="1700" b="1">
-                <a:solidFill>
-                  <a:srgbClr val="1F8A8F"/>
-                </a:solidFill>
-                <a:latin typeface="Verdana"/>
-              </a:rPr>
-              <a:t>A bus's condition changes minute by minute while it is on the road, but a depot inspection only sees the vehicle once it is parked.</a:t>
-            </a:r>
-          </a:p>
-          <a:p>
-            <a:pPr>
-              <a:spcAft>
-                <a:spcPts val="900"/>
-              </a:spcAft>
-            </a:pPr>
-            <a:r>
-              <a:rPr sz="1700" b="0">
-                <a:solidFill>
-                  <a:srgbClr val="232A26"/>
-                </a:solidFill>
-                <a:latin typeface="Verdana"/>
-              </a:rPr>
-              <a:t>Faults develop mid-route: engine overheating and brake wear build up during service, so by the evening walk-around the damage is hours old.</a:t>
-            </a:r>
-          </a:p>
-          <a:p>
-            <a:pPr>
-              <a:spcAft>
-                <a:spcPts val="900"/>
-              </a:spcAft>
-            </a:pPr>
-            <a:r>
-              <a:rPr sz="1700" b="0">
-                <a:solidFill>
-                  <a:srgbClr val="232A26"/>
-                </a:solidFill>
-                <a:latin typeface="Verdana"/>
-              </a:rPr>
-              <a:t>Some problems cannot wait: overcrowding and low fuel need a response now, not a line in the end-of-shift report.</a:t>
-            </a:r>
-          </a:p>
-          <a:p>
-            <a:pPr>
-              <a:spcAft>
-                <a:spcPts val="900"/>
-              </a:spcAft>
-            </a:pPr>
-            <a:r>
-              <a:rPr sz="1700" b="0">
-                <a:solidFill>
-                  <a:srgbClr val="232A26"/>
-                </a:solidFill>
-                <a:latin typeface="Verdana"/>
-              </a:rPr>
-              <a:t>Too much to watch by hand: five metrics per depot across two depots is ten continuous telemetry streams, far more than staff can reliably eyeball.</a:t>
-            </a:r>
-          </a:p>
-          <a:p>
-            <a:pPr>
-              <a:spcAft>
-                <a:spcPts val="900"/>
-              </a:spcAft>
-            </a:pPr>
-            <a:r>
-              <a:rPr sz="1700" b="0">
-                <a:solidFill>
-                  <a:srgbClr val="232A26"/>
-                </a:solidFill>
-                <a:latin typeface="Verdana"/>
-              </a:rPr>
-              <a:t>10 live telemetry streams.</a:t>
-            </a:r>
-          </a:p>
-          <a:p>
-            <a:pPr>
-              <a:spcAft>
-                <a:spcPts val="900"/>
-              </a:spcAft>
-            </a:pPr>
-            <a:r>
-              <a:rPr sz="1700" b="0">
-                <a:solidFill>
-                  <a:srgbClr val="232A26"/>
-                </a:solidFill>
-                <a:latin typeface="Verdana"/>
-              </a:rPr>
-              <a:t>4 safety alert rules at the edge.</a:t>
-            </a:r>
-          </a:p>
-          <a:p>
-            <a:pPr>
-              <a:spcAft>
-                <a:spcPts val="900"/>
-              </a:spcAft>
-            </a:pPr>
-            <a:r>
-              <a:rPr sz="1700" b="0">
-                <a:solidFill>
-                  <a:srgbClr val="232A26"/>
-                </a:solidFill>
-                <a:latin typeface="Verdana"/>
-              </a:rPr>
-              <a:t>2 depots, one shared fog gateway.</a:t>
-            </a:r>
-          </a:p>
-        </p:txBody>
-      </p:sp>
-      <p:sp>
-        <p:nvSpPr>
           <p:cNvPr id="5" name="Rectangle 4"/>
           <p:cNvSpPr/>
           <p:nvPr/>
         </p:nvSpPr>
         <p:spPr>
           <a:xfrm>
-            <a:off x="658368" y="1261872"/>
-            <a:ext cx="3108960" cy="36576"/>
+            <a:off x="658368" y="6355080"/>
+            <a:ext cx="2743200" cy="36576"/>
           </a:xfrm>
           <a:prstGeom prst="rect">
             <a:avLst/>
           </a:prstGeom>
           <a:solidFill>
-            <a:srgbClr val="1F8A8F"/>
+            <a:srgbClr val="1F7A5A"/>
           </a:solidFill>
           <a:ln>
             <a:noFill/>
@@ -3592,20 +3592,188 @@
       <p:grpSpPr/>
       <p:sp>
         <p:nvSpPr>
+          <p:cNvPr id="2" name="Title 1"/>
+          <p:cNvSpPr>
+            <a:spLocks noGrp="1"/>
+          </p:cNvSpPr>
+          <p:nvPr>
+            <p:ph type="title"/>
+          </p:nvPr>
+        </p:nvSpPr>
+        <p:spPr>
+          <a:xfrm>
+            <a:off x="640080" y="411480"/>
+            <a:ext cx="10972800" cy="822960"/>
+          </a:xfrm>
+        </p:spPr>
+        <p:txBody>
+          <a:bodyPr wrap="square" anchor="t"/>
+          <a:lstStyle/>
+          <a:p>
+            <a:pPr algn="l"/>
+            <a:r>
+              <a:rPr b="1" sz="2700">
+                <a:solidFill>
+                  <a:srgbClr val="232A26"/>
+                </a:solidFill>
+                <a:latin typeface="Century Gothic"/>
+              </a:rPr>
+              <a:t>How it works: edge to serverless cloud</a:t>
+            </a:r>
+          </a:p>
+        </p:txBody>
+      </p:sp>
+      <p:sp>
+        <p:nvSpPr>
+          <p:cNvPr id="3" name="Content Placeholder 2"/>
+          <p:cNvSpPr>
+            <a:spLocks noGrp="1"/>
+          </p:cNvSpPr>
+          <p:nvPr>
+            <p:ph idx="1"/>
+          </p:nvPr>
+        </p:nvSpPr>
+        <p:spPr>
+          <a:xfrm>
+            <a:off x="658368" y="1463040"/>
+            <a:ext cx="10972800" cy="4663440"/>
+          </a:xfrm>
+        </p:spPr>
+        <p:txBody>
+          <a:bodyPr wrap="square">
+            <a:normAutofit/>
+          </a:bodyPr>
+          <a:lstStyle/>
+          <a:p>
+            <a:pPr>
+              <a:spcAft>
+                <a:spcPts val="900"/>
+              </a:spcAft>
+            </a:pPr>
+            <a:r>
+              <a:rPr sz="1700" b="0">
+                <a:solidFill>
+                  <a:srgbClr val="232A26"/>
+                </a:solidFill>
+                <a:latin typeface="Calibri"/>
+              </a:rPr>
+              <a:t>Bus sensors: engine temp, brake wear, passengers, fuel and speed, five streams per depot.</a:t>
+            </a:r>
+          </a:p>
+          <a:p>
+            <a:pPr>
+              <a:spcAft>
+                <a:spcPts val="900"/>
+              </a:spcAft>
+            </a:pPr>
+            <a:r>
+              <a:rPr sz="1700" b="0">
+                <a:solidFill>
+                  <a:srgbClr val="232A26"/>
+                </a:solidFill>
+                <a:latin typeface="Calibri"/>
+              </a:rPr>
+              <a:t>Fog gateway: windows and aggregates each stream, and checks four safety rules at the edge.</a:t>
+            </a:r>
+          </a:p>
+          <a:p>
+            <a:pPr>
+              <a:spcAft>
+                <a:spcPts val="900"/>
+              </a:spcAft>
+            </a:pPr>
+            <a:r>
+              <a:rPr sz="1700" b="0">
+                <a:solidFill>
+                  <a:srgbClr val="232A26"/>
+                </a:solidFill>
+                <a:latin typeface="Calibri"/>
+              </a:rPr>
+              <a:t>Queue (Amazon SQS): carries one compact aggregate per window, not raw readings.</a:t>
+            </a:r>
+          </a:p>
+          <a:p>
+            <a:pPr>
+              <a:spcAft>
+                <a:spcPts val="900"/>
+              </a:spcAft>
+            </a:pPr>
+            <a:r>
+              <a:rPr sz="1700" b="0">
+                <a:solidFill>
+                  <a:srgbClr val="232A26"/>
+                </a:solidFill>
+                <a:latin typeface="Calibri"/>
+              </a:rPr>
+              <a:t>AWS Lambda: serverless ingest that consumes the queue and batch-writes records.</a:t>
+            </a:r>
+          </a:p>
+          <a:p>
+            <a:pPr>
+              <a:spcAft>
+                <a:spcPts val="900"/>
+              </a:spcAft>
+            </a:pPr>
+            <a:r>
+              <a:rPr sz="1700" b="0">
+                <a:solidFill>
+                  <a:srgbClr val="232A26"/>
+                </a:solidFill>
+                <a:latin typeface="Calibri"/>
+              </a:rPr>
+              <a:t>Amazon DynamoDB: time-ordered store of per-window fleet records.</a:t>
+            </a:r>
+          </a:p>
+          <a:p>
+            <a:pPr>
+              <a:spcAft>
+                <a:spcPts val="900"/>
+              </a:spcAft>
+            </a:pPr>
+            <a:r>
+              <a:rPr sz="1700" b="0">
+                <a:solidFill>
+                  <a:srgbClr val="232A26"/>
+                </a:solidFill>
+                <a:latin typeface="Calibri"/>
+              </a:rPr>
+              <a:t>Live dashboard: per-depot fleet cards and trends, served by S3 and API Gateway on AWS.</a:t>
+            </a:r>
+          </a:p>
+          <a:p>
+            <a:pPr>
+              <a:spcAft>
+                <a:spcPts val="900"/>
+              </a:spcAft>
+            </a:pPr>
+            <a:r>
+              <a:rPr sz="1700" b="0">
+                <a:solidFill>
+                  <a:srgbClr val="232A26"/>
+                </a:solidFill>
+                <a:latin typeface="Calibri"/>
+              </a:rPr>
+              <a:t>Verified end-to-end locally on Docker and LocalStack, an AWS emulator, and deploys to AWS with a single scripted step.</a:t>
+            </a:r>
+          </a:p>
+        </p:txBody>
+      </p:sp>
+      <p:sp>
+        <p:nvSpPr>
           <p:cNvPr id="4" name="Rectangle 3"/>
           <p:cNvSpPr/>
           <p:nvPr/>
         </p:nvSpPr>
         <p:spPr>
           <a:xfrm>
-            <a:off x="-45720" y="-45720"/>
-            <a:ext cx="5486400" cy="6949440"/>
+            <a:off x="658368" y="1207008"/>
+            <a:ext cx="10881360" cy="45720"/>
           </a:xfrm>
           <a:prstGeom prst="rect">
             <a:avLst/>
           </a:prstGeom>
           <a:solidFill>
-            <a:srgbClr val="E4F0F1"/>
+            <a:srgbClr val="1F7A5A"/>
           </a:solidFill>
           <a:ln>
             <a:noFill/>
@@ -3636,188 +3804,20 @@
       </p:sp>
       <p:sp>
         <p:nvSpPr>
-          <p:cNvPr id="2" name="Title 1"/>
-          <p:cNvSpPr>
-            <a:spLocks noGrp="1"/>
-          </p:cNvSpPr>
-          <p:nvPr>
-            <p:ph type="title"/>
-          </p:nvPr>
-        </p:nvSpPr>
-        <p:spPr>
-          <a:xfrm>
-            <a:off x="640080" y="384048"/>
-            <a:ext cx="10972800" cy="868680"/>
-          </a:xfrm>
-        </p:spPr>
-        <p:txBody>
-          <a:bodyPr wrap="square" anchor="t"/>
-          <a:lstStyle/>
-          <a:p>
-            <a:pPr algn="l"/>
-            <a:r>
-              <a:rPr b="1" sz="2700">
-                <a:solidFill>
-                  <a:srgbClr val="1F8A8F"/>
-                </a:solidFill>
-                <a:latin typeface="Corbel"/>
-              </a:rPr>
-              <a:t>How it works: edge to serverless cloud</a:t>
-            </a:r>
-          </a:p>
-        </p:txBody>
-      </p:sp>
-      <p:sp>
-        <p:nvSpPr>
-          <p:cNvPr id="3" name="Content Placeholder 2"/>
-          <p:cNvSpPr>
-            <a:spLocks noGrp="1"/>
-          </p:cNvSpPr>
-          <p:nvPr>
-            <p:ph idx="1"/>
-          </p:nvPr>
-        </p:nvSpPr>
-        <p:spPr>
-          <a:xfrm>
-            <a:off x="658368" y="1481328"/>
-            <a:ext cx="10972800" cy="4846320"/>
-          </a:xfrm>
-        </p:spPr>
-        <p:txBody>
-          <a:bodyPr wrap="square">
-            <a:normAutofit/>
-          </a:bodyPr>
-          <a:lstStyle/>
-          <a:p>
-            <a:pPr>
-              <a:spcAft>
-                <a:spcPts val="900"/>
-              </a:spcAft>
-            </a:pPr>
-            <a:r>
-              <a:rPr sz="1700" b="0">
-                <a:solidFill>
-                  <a:srgbClr val="232A26"/>
-                </a:solidFill>
-                <a:latin typeface="Verdana"/>
-              </a:rPr>
-              <a:t>Bus sensors: engine temp, brake wear, passengers, fuel and speed, five streams per depot.</a:t>
-            </a:r>
-          </a:p>
-          <a:p>
-            <a:pPr>
-              <a:spcAft>
-                <a:spcPts val="900"/>
-              </a:spcAft>
-            </a:pPr>
-            <a:r>
-              <a:rPr sz="1700" b="0">
-                <a:solidFill>
-                  <a:srgbClr val="232A26"/>
-                </a:solidFill>
-                <a:latin typeface="Verdana"/>
-              </a:rPr>
-              <a:t>Fog gateway: windows and aggregates each stream, and checks four safety rules at the edge.</a:t>
-            </a:r>
-          </a:p>
-          <a:p>
-            <a:pPr>
-              <a:spcAft>
-                <a:spcPts val="900"/>
-              </a:spcAft>
-            </a:pPr>
-            <a:r>
-              <a:rPr sz="1700" b="0">
-                <a:solidFill>
-                  <a:srgbClr val="232A26"/>
-                </a:solidFill>
-                <a:latin typeface="Verdana"/>
-              </a:rPr>
-              <a:t>Queue (Amazon SQS): carries one compact aggregate per window, not raw readings.</a:t>
-            </a:r>
-          </a:p>
-          <a:p>
-            <a:pPr>
-              <a:spcAft>
-                <a:spcPts val="900"/>
-              </a:spcAft>
-            </a:pPr>
-            <a:r>
-              <a:rPr sz="1700" b="0">
-                <a:solidFill>
-                  <a:srgbClr val="232A26"/>
-                </a:solidFill>
-                <a:latin typeface="Verdana"/>
-              </a:rPr>
-              <a:t>AWS Lambda: serverless ingest that consumes the queue and batch-writes records.</a:t>
-            </a:r>
-          </a:p>
-          <a:p>
-            <a:pPr>
-              <a:spcAft>
-                <a:spcPts val="900"/>
-              </a:spcAft>
-            </a:pPr>
-            <a:r>
-              <a:rPr sz="1700" b="0">
-                <a:solidFill>
-                  <a:srgbClr val="232A26"/>
-                </a:solidFill>
-                <a:latin typeface="Verdana"/>
-              </a:rPr>
-              <a:t>Amazon DynamoDB: time-ordered store of per-window fleet records.</a:t>
-            </a:r>
-          </a:p>
-          <a:p>
-            <a:pPr>
-              <a:spcAft>
-                <a:spcPts val="900"/>
-              </a:spcAft>
-            </a:pPr>
-            <a:r>
-              <a:rPr sz="1700" b="0">
-                <a:solidFill>
-                  <a:srgbClr val="232A26"/>
-                </a:solidFill>
-                <a:latin typeface="Verdana"/>
-              </a:rPr>
-              <a:t>Live dashboard: per-depot fleet cards and trends, served by S3 and API Gateway on AWS.</a:t>
-            </a:r>
-          </a:p>
-          <a:p>
-            <a:pPr>
-              <a:spcAft>
-                <a:spcPts val="900"/>
-              </a:spcAft>
-            </a:pPr>
-            <a:r>
-              <a:rPr sz="1700" b="1">
-                <a:solidFill>
-                  <a:srgbClr val="1F8A8F"/>
-                </a:solidFill>
-                <a:latin typeface="Verdana"/>
-              </a:rPr>
-              <a:t>Verified end-to-end locally on Docker and LocalStack, an AWS emulator, and deploys to AWS with a single scripted step.</a:t>
-            </a:r>
-          </a:p>
-        </p:txBody>
-      </p:sp>
-      <p:sp>
-        <p:nvSpPr>
           <p:cNvPr id="5" name="Rectangle 4"/>
           <p:cNvSpPr/>
           <p:nvPr/>
         </p:nvSpPr>
         <p:spPr>
           <a:xfrm>
-            <a:off x="658368" y="1261872"/>
-            <a:ext cx="3108960" cy="36576"/>
+            <a:off x="658368" y="6355080"/>
+            <a:ext cx="2743200" cy="36576"/>
           </a:xfrm>
           <a:prstGeom prst="rect">
             <a:avLst/>
           </a:prstGeom>
           <a:solidFill>
-            <a:srgbClr val="1F8A8F"/>
+            <a:srgbClr val="1F7A5A"/>
           </a:solidFill>
           <a:ln>
             <a:noFill/>
@@ -3866,20 +3866,140 @@
       <p:grpSpPr/>
       <p:sp>
         <p:nvSpPr>
+          <p:cNvPr id="2" name="Title 1"/>
+          <p:cNvSpPr>
+            <a:spLocks noGrp="1"/>
+          </p:cNvSpPr>
+          <p:nvPr>
+            <p:ph type="title"/>
+          </p:nvPr>
+        </p:nvSpPr>
+        <p:spPr>
+          <a:xfrm>
+            <a:off x="640080" y="411480"/>
+            <a:ext cx="10972800" cy="822960"/>
+          </a:xfrm>
+        </p:spPr>
+        <p:txBody>
+          <a:bodyPr wrap="square" anchor="t"/>
+          <a:lstStyle/>
+          <a:p>
+            <a:pPr algn="l"/>
+            <a:r>
+              <a:rPr b="1" sz="2700">
+                <a:solidFill>
+                  <a:srgbClr val="232A26"/>
+                </a:solidFill>
+                <a:latin typeface="Century Gothic"/>
+              </a:rPr>
+              <a:t>Demonstration highlights</a:t>
+            </a:r>
+          </a:p>
+        </p:txBody>
+      </p:sp>
+      <p:sp>
+        <p:nvSpPr>
+          <p:cNvPr id="3" name="Content Placeholder 2"/>
+          <p:cNvSpPr>
+            <a:spLocks noGrp="1"/>
+          </p:cNvSpPr>
+          <p:nvPr>
+            <p:ph idx="1"/>
+          </p:nvPr>
+        </p:nvSpPr>
+        <p:spPr>
+          <a:xfrm>
+            <a:off x="658368" y="1463040"/>
+            <a:ext cx="5760720" cy="4663440"/>
+          </a:xfrm>
+        </p:spPr>
+        <p:txBody>
+          <a:bodyPr wrap="square">
+            <a:normAutofit/>
+          </a:bodyPr>
+          <a:lstStyle/>
+          <a:p>
+            <a:pPr>
+              <a:spcAft>
+                <a:spcPts val="800"/>
+              </a:spcAft>
+            </a:pPr>
+            <a:r>
+              <a:rPr sz="1500" b="0">
+                <a:solidFill>
+                  <a:srgbClr val="232A26"/>
+                </a:solidFill>
+                <a:latin typeface="Calibri"/>
+              </a:rPr>
+              <a:t>Live dashboard during the local demo run: all four pipeline health checks green (top right) and a real overcrowding alert firing for depot-a.</a:t>
+            </a:r>
+          </a:p>
+          <a:p>
+            <a:pPr>
+              <a:spcAft>
+                <a:spcPts val="800"/>
+              </a:spcAft>
+            </a:pPr>
+            <a:r>
+              <a:rPr sz="1500" b="0">
+                <a:solidFill>
+                  <a:srgbClr val="232A26"/>
+                </a:solidFill>
+                <a:latin typeface="Calibri"/>
+              </a:rPr>
+              <a:t>130 automated tests pass across the four modules.</a:t>
+            </a:r>
+          </a:p>
+          <a:p>
+            <a:pPr>
+              <a:spcAft>
+                <a:spcPts val="800"/>
+              </a:spcAft>
+            </a:pPr>
+            <a:r>
+              <a:rPr sz="1500" b="0">
+                <a:solidFill>
+                  <a:srgbClr val="232A26"/>
+                </a:solidFill>
+                <a:latin typeface="Calibri"/>
+              </a:rPr>
+              <a:t>2,000 message burst absorbed in the load test, using 32 parallel workers.</a:t>
+            </a:r>
+          </a:p>
+          <a:p>
+            <a:pPr>
+              <a:spcAft>
+                <a:spcPts val="800"/>
+              </a:spcAft>
+            </a:pPr>
+            <a:r>
+              <a:rPr sz="1500" b="0">
+                <a:solidFill>
+                  <a:srgbClr val="232A26"/>
+                </a:solidFill>
+                <a:latin typeface="Calibri"/>
+              </a:rPr>
+              <a:t>4/4 health checks green: gateway, queue, Lambda, pipeline.</a:t>
+            </a:r>
+          </a:p>
+        </p:txBody>
+      </p:sp>
+      <p:sp>
+        <p:nvSpPr>
           <p:cNvPr id="4" name="Rectangle 3"/>
           <p:cNvSpPr/>
           <p:nvPr/>
         </p:nvSpPr>
         <p:spPr>
           <a:xfrm>
-            <a:off x="-45720" y="-45720"/>
-            <a:ext cx="5486400" cy="6949440"/>
+            <a:off x="658368" y="1207008"/>
+            <a:ext cx="10881360" cy="45720"/>
           </a:xfrm>
           <a:prstGeom prst="rect">
             <a:avLst/>
           </a:prstGeom>
           <a:solidFill>
-            <a:srgbClr val="E4F0F1"/>
+            <a:srgbClr val="1F7A5A"/>
           </a:solidFill>
           <a:ln>
             <a:noFill/>
@@ -3908,142 +4028,46 @@
           </a:p>
         </p:txBody>
       </p:sp>
-      <p:sp>
-        <p:nvSpPr>
-          <p:cNvPr id="2" name="Title 1"/>
-          <p:cNvSpPr>
-            <a:spLocks noGrp="1"/>
-          </p:cNvSpPr>
-          <p:nvPr>
-            <p:ph type="title"/>
-          </p:nvPr>
-        </p:nvSpPr>
+      <p:pic>
+        <p:nvPicPr>
+          <p:cNvPr id="5" name="Picture 4" descr="dashboard-desktop.png"/>
+          <p:cNvPicPr>
+            <a:picLocks noChangeAspect="1"/>
+          </p:cNvPicPr>
+          <p:nvPr/>
+        </p:nvPicPr>
+        <p:blipFill>
+          <a:blip r:embed="rId2"/>
+          <a:stretch>
+            <a:fillRect/>
+          </a:stretch>
+        </p:blipFill>
         <p:spPr>
           <a:xfrm>
-            <a:off x="640080" y="384048"/>
-            <a:ext cx="10972800" cy="868680"/>
+            <a:off x="6944177" y="1499616"/>
+            <a:ext cx="4491085" cy="4480560"/>
           </a:xfrm>
+          <a:prstGeom prst="rect">
+            <a:avLst/>
+          </a:prstGeom>
         </p:spPr>
-        <p:txBody>
-          <a:bodyPr wrap="square" anchor="t"/>
-          <a:lstStyle/>
-          <a:p>
-            <a:pPr algn="l"/>
-            <a:r>
-              <a:rPr b="1" sz="2700">
-                <a:solidFill>
-                  <a:srgbClr val="1F8A8F"/>
-                </a:solidFill>
-                <a:latin typeface="Corbel"/>
-              </a:rPr>
-              <a:t>Demonstration highlights</a:t>
-            </a:r>
-          </a:p>
-        </p:txBody>
-      </p:sp>
-      <p:sp>
-        <p:nvSpPr>
-          <p:cNvPr id="3" name="Content Placeholder 2"/>
-          <p:cNvSpPr>
-            <a:spLocks noGrp="1"/>
-          </p:cNvSpPr>
-          <p:nvPr>
-            <p:ph idx="1"/>
-          </p:nvPr>
+      </p:pic>
+      <p:sp>
+        <p:nvSpPr>
+          <p:cNvPr id="6" name="Rectangle 5"/>
+          <p:cNvSpPr/>
+          <p:nvPr/>
         </p:nvSpPr>
         <p:spPr>
           <a:xfrm>
-            <a:off x="658368" y="1481328"/>
-            <a:ext cx="4663440" cy="4754880"/>
-          </a:xfrm>
-        </p:spPr>
-        <p:txBody>
-          <a:bodyPr wrap="square">
-            <a:normAutofit/>
-          </a:bodyPr>
-          <a:lstStyle/>
-          <a:p>
-            <a:pPr>
-              <a:spcAft>
-                <a:spcPts val="800"/>
-              </a:spcAft>
-            </a:pPr>
-            <a:r>
-              <a:rPr sz="1500" b="1">
-                <a:solidFill>
-                  <a:srgbClr val="1F8A8F"/>
-                </a:solidFill>
-                <a:latin typeface="Verdana"/>
-              </a:rPr>
-              <a:t>Live dashboard during the local demo run: all four pipeline health checks green (top right) and a real overcrowding alert firing for depot-a.</a:t>
-            </a:r>
-          </a:p>
-          <a:p>
-            <a:pPr>
-              <a:spcAft>
-                <a:spcPts val="800"/>
-              </a:spcAft>
-            </a:pPr>
-            <a:r>
-              <a:rPr sz="1500" b="0">
-                <a:solidFill>
-                  <a:srgbClr val="232A26"/>
-                </a:solidFill>
-                <a:latin typeface="Verdana"/>
-              </a:rPr>
-              <a:t>130 automated tests pass across the four modules.</a:t>
-            </a:r>
-          </a:p>
-          <a:p>
-            <a:pPr>
-              <a:spcAft>
-                <a:spcPts val="800"/>
-              </a:spcAft>
-            </a:pPr>
-            <a:r>
-              <a:rPr sz="1500" b="0">
-                <a:solidFill>
-                  <a:srgbClr val="232A26"/>
-                </a:solidFill>
-                <a:latin typeface="Verdana"/>
-              </a:rPr>
-              <a:t>2,000 message burst absorbed in the load test, using 32 parallel workers.</a:t>
-            </a:r>
-          </a:p>
-          <a:p>
-            <a:pPr>
-              <a:spcAft>
-                <a:spcPts val="800"/>
-              </a:spcAft>
-            </a:pPr>
-            <a:r>
-              <a:rPr sz="1500" b="0">
-                <a:solidFill>
-                  <a:srgbClr val="232A26"/>
-                </a:solidFill>
-                <a:latin typeface="Verdana"/>
-              </a:rPr>
-              <a:t>4/4 health checks green: gateway, queue, Lambda, pipeline.</a:t>
-            </a:r>
-          </a:p>
-        </p:txBody>
-      </p:sp>
-      <p:sp>
-        <p:nvSpPr>
-          <p:cNvPr id="5" name="Rectangle 4"/>
-          <p:cNvSpPr/>
-          <p:nvPr/>
-        </p:nvSpPr>
-        <p:spPr>
-          <a:xfrm>
-            <a:off x="658368" y="1261872"/>
-            <a:ext cx="3108960" cy="36576"/>
+            <a:off x="658368" y="6355080"/>
+            <a:ext cx="2743200" cy="36576"/>
           </a:xfrm>
           <a:prstGeom prst="rect">
             <a:avLst/>
           </a:prstGeom>
           <a:solidFill>
-            <a:srgbClr val="1F8A8F"/>
+            <a:srgbClr val="1F7A5A"/>
           </a:solidFill>
           <a:ln>
             <a:noFill/>
@@ -4072,30 +4096,6 @@
           </a:p>
         </p:txBody>
       </p:sp>
-      <p:pic>
-        <p:nvPicPr>
-          <p:cNvPr id="6" name="Picture 5" descr="dashboard-desktop.png"/>
-          <p:cNvPicPr>
-            <a:picLocks noChangeAspect="1"/>
-          </p:cNvPicPr>
-          <p:nvPr/>
-        </p:nvPicPr>
-        <p:blipFill>
-          <a:blip r:embed="rId2"/>
-          <a:stretch>
-            <a:fillRect/>
-          </a:stretch>
-        </p:blipFill>
-        <p:spPr>
-          <a:xfrm>
-            <a:off x="6486869" y="1517904"/>
-            <a:ext cx="4582740" cy="4572000"/>
-          </a:xfrm>
-          <a:prstGeom prst="rect">
-            <a:avLst/>
-          </a:prstGeom>
-        </p:spPr>
-      </p:pic>
     </p:spTree>
   </p:cSld>
   <p:clrMapOvr>
@@ -4116,20 +4116,188 @@
       <p:grpSpPr/>
       <p:sp>
         <p:nvSpPr>
+          <p:cNvPr id="2" name="Title 1"/>
+          <p:cNvSpPr>
+            <a:spLocks noGrp="1"/>
+          </p:cNvSpPr>
+          <p:nvPr>
+            <p:ph type="title"/>
+          </p:nvPr>
+        </p:nvSpPr>
+        <p:spPr>
+          <a:xfrm>
+            <a:off x="640080" y="411480"/>
+            <a:ext cx="10972800" cy="822960"/>
+          </a:xfrm>
+        </p:spPr>
+        <p:txBody>
+          <a:bodyPr wrap="square" anchor="t"/>
+          <a:lstStyle/>
+          <a:p>
+            <a:pPr algn="l"/>
+            <a:r>
+              <a:rPr b="1" sz="2700">
+                <a:solidFill>
+                  <a:srgbClr val="232A26"/>
+                </a:solidFill>
+                <a:latin typeface="Century Gothic"/>
+              </a:rPr>
+              <a:t>The hardest part and how it was solved</a:t>
+            </a:r>
+          </a:p>
+        </p:txBody>
+      </p:sp>
+      <p:sp>
+        <p:nvSpPr>
+          <p:cNvPr id="3" name="Content Placeholder 2"/>
+          <p:cNvSpPr>
+            <a:spLocks noGrp="1"/>
+          </p:cNvSpPr>
+          <p:nvPr>
+            <p:ph idx="1"/>
+          </p:nvPr>
+        </p:nvSpPr>
+        <p:spPr>
+          <a:xfrm>
+            <a:off x="658368" y="1463040"/>
+            <a:ext cx="10972800" cy="4663440"/>
+          </a:xfrm>
+        </p:spPr>
+        <p:txBody>
+          <a:bodyPr wrap="square">
+            <a:normAutofit/>
+          </a:bodyPr>
+          <a:lstStyle/>
+          <a:p>
+            <a:pPr>
+              <a:spcAft>
+                <a:spcPts val="900"/>
+              </a:spcAft>
+            </a:pPr>
+            <a:r>
+              <a:rPr sz="1700" b="0">
+                <a:solidFill>
+                  <a:srgbClr val="232A26"/>
+                </a:solidFill>
+                <a:latin typeface="Calibri"/>
+              </a:rPr>
+              <a:t>The problem:</a:t>
+            </a:r>
+          </a:p>
+          <a:p>
+            <a:pPr lvl="1">
+              <a:spcAft>
+                <a:spcPts val="900"/>
+              </a:spcAft>
+            </a:pPr>
+            <a:r>
+              <a:rPr sz="1500" b="0">
+                <a:solidFill>
+                  <a:srgbClr val="232A26"/>
+                </a:solidFill>
+                <a:latin typeface="Calibri"/>
+              </a:rPr>
+              <a:t>Ten sensor streams post readings to one fog gateway while, at the same moment, a timer thread drains the buffer to build the window aggregates. Every reading must survive that handover.</a:t>
+            </a:r>
+          </a:p>
+          <a:p>
+            <a:pPr>
+              <a:spcAft>
+                <a:spcPts val="900"/>
+              </a:spcAft>
+            </a:pPr>
+            <a:r>
+              <a:rPr sz="1700" b="0">
+                <a:solidFill>
+                  <a:srgbClr val="232A26"/>
+                </a:solidFill>
+                <a:latin typeface="Calibri"/>
+              </a:rPr>
+              <a:t>Why it is hard:</a:t>
+            </a:r>
+          </a:p>
+          <a:p>
+            <a:pPr lvl="1">
+              <a:spcAft>
+                <a:spcPts val="900"/>
+              </a:spcAft>
+            </a:pPr>
+            <a:r>
+              <a:rPr sz="1500" b="0">
+                <a:solidFill>
+                  <a:srgbClr val="232A26"/>
+                </a:solidFill>
+                <a:latin typeface="Calibri"/>
+              </a:rPr>
+              <a:t>A reading dropped in the race does not crash anything; the fleet averages are just silently wrong. And locking every insert fixes the race only by making ten senders queue behind each other.</a:t>
+            </a:r>
+          </a:p>
+          <a:p>
+            <a:pPr>
+              <a:spcAft>
+                <a:spcPts val="900"/>
+              </a:spcAft>
+            </a:pPr>
+            <a:r>
+              <a:rPr sz="1700" b="0">
+                <a:solidFill>
+                  <a:srgbClr val="232A26"/>
+                </a:solidFill>
+                <a:latin typeface="Calibri"/>
+              </a:rPr>
+              <a:t>The fix:</a:t>
+            </a:r>
+          </a:p>
+          <a:p>
+            <a:pPr lvl="1">
+              <a:spcAft>
+                <a:spcPts val="900"/>
+              </a:spcAft>
+            </a:pPr>
+            <a:r>
+              <a:rPr sz="1500" b="0">
+                <a:solidFill>
+                  <a:srgbClr val="232A26"/>
+                </a:solidFill>
+                <a:latin typeface="Calibri"/>
+              </a:rPr>
+              <a:t>Make ingest lock-free: each arriving reading is a single atomic enqueue, nothing else. All grouping by depot and sensor type is deferred to a one-thread drain at flush time.</a:t>
+            </a:r>
+          </a:p>
+          <a:p>
+            <a:pPr>
+              <a:spcAft>
+                <a:spcPts val="900"/>
+              </a:spcAft>
+            </a:pPr>
+            <a:r>
+              <a:rPr sz="1700" b="0">
+                <a:solidFill>
+                  <a:srgbClr val="232A26"/>
+                </a:solidFill>
+                <a:latin typeface="Calibri"/>
+              </a:rPr>
+              <a:t>Proven, not hoped: an automated stress test hammers the intake with 32 concurrent threads writing 200 readings each, and after the drain every one of the 6,400 readings is accounted for, with zero lost.</a:t>
+            </a:r>
+          </a:p>
+        </p:txBody>
+      </p:sp>
+      <p:sp>
+        <p:nvSpPr>
           <p:cNvPr id="4" name="Rectangle 3"/>
           <p:cNvSpPr/>
           <p:nvPr/>
         </p:nvSpPr>
         <p:spPr>
           <a:xfrm>
-            <a:off x="-45720" y="-45720"/>
-            <a:ext cx="5486400" cy="6949440"/>
+            <a:off x="658368" y="1207008"/>
+            <a:ext cx="10881360" cy="45720"/>
           </a:xfrm>
           <a:prstGeom prst="rect">
             <a:avLst/>
           </a:prstGeom>
           <a:solidFill>
-            <a:srgbClr val="E4F0F1"/>
+            <a:srgbClr val="1F7A5A"/>
           </a:solidFill>
           <a:ln>
             <a:noFill/>
@@ -4160,188 +4328,20 @@
       </p:sp>
       <p:sp>
         <p:nvSpPr>
-          <p:cNvPr id="2" name="Title 1"/>
-          <p:cNvSpPr>
-            <a:spLocks noGrp="1"/>
-          </p:cNvSpPr>
-          <p:nvPr>
-            <p:ph type="title"/>
-          </p:nvPr>
-        </p:nvSpPr>
-        <p:spPr>
-          <a:xfrm>
-            <a:off x="640080" y="384048"/>
-            <a:ext cx="10972800" cy="868680"/>
-          </a:xfrm>
-        </p:spPr>
-        <p:txBody>
-          <a:bodyPr wrap="square" anchor="t"/>
-          <a:lstStyle/>
-          <a:p>
-            <a:pPr algn="l"/>
-            <a:r>
-              <a:rPr b="1" sz="2700">
-                <a:solidFill>
-                  <a:srgbClr val="1F8A8F"/>
-                </a:solidFill>
-                <a:latin typeface="Corbel"/>
-              </a:rPr>
-              <a:t>The hardest part and how it was solved</a:t>
-            </a:r>
-          </a:p>
-        </p:txBody>
-      </p:sp>
-      <p:sp>
-        <p:nvSpPr>
-          <p:cNvPr id="3" name="Content Placeholder 2"/>
-          <p:cNvSpPr>
-            <a:spLocks noGrp="1"/>
-          </p:cNvSpPr>
-          <p:nvPr>
-            <p:ph idx="1"/>
-          </p:nvPr>
-        </p:nvSpPr>
-        <p:spPr>
-          <a:xfrm>
-            <a:off x="658368" y="1481328"/>
-            <a:ext cx="10972800" cy="4846320"/>
-          </a:xfrm>
-        </p:spPr>
-        <p:txBody>
-          <a:bodyPr wrap="square">
-            <a:normAutofit/>
-          </a:bodyPr>
-          <a:lstStyle/>
-          <a:p>
-            <a:pPr>
-              <a:spcAft>
-                <a:spcPts val="900"/>
-              </a:spcAft>
-            </a:pPr>
-            <a:r>
-              <a:rPr sz="1700" b="1">
-                <a:solidFill>
-                  <a:srgbClr val="1F8A8F"/>
-                </a:solidFill>
-                <a:latin typeface="Verdana"/>
-              </a:rPr>
-              <a:t>The problem:</a:t>
-            </a:r>
-          </a:p>
-          <a:p>
-            <a:pPr lvl="1">
-              <a:spcAft>
-                <a:spcPts val="900"/>
-              </a:spcAft>
-            </a:pPr>
-            <a:r>
-              <a:rPr sz="1500" b="0">
-                <a:solidFill>
-                  <a:srgbClr val="232A26"/>
-                </a:solidFill>
-                <a:latin typeface="Verdana"/>
-              </a:rPr>
-              <a:t>Ten sensor streams post readings to one fog gateway while, at the same moment, a timer thread drains the buffer to build the window aggregates. Every reading must survive that handover.</a:t>
-            </a:r>
-          </a:p>
-          <a:p>
-            <a:pPr>
-              <a:spcAft>
-                <a:spcPts val="900"/>
-              </a:spcAft>
-            </a:pPr>
-            <a:r>
-              <a:rPr sz="1700" b="1">
-                <a:solidFill>
-                  <a:srgbClr val="1F8A8F"/>
-                </a:solidFill>
-                <a:latin typeface="Verdana"/>
-              </a:rPr>
-              <a:t>Why it is hard:</a:t>
-            </a:r>
-          </a:p>
-          <a:p>
-            <a:pPr lvl="1">
-              <a:spcAft>
-                <a:spcPts val="900"/>
-              </a:spcAft>
-            </a:pPr>
-            <a:r>
-              <a:rPr sz="1500" b="0">
-                <a:solidFill>
-                  <a:srgbClr val="232A26"/>
-                </a:solidFill>
-                <a:latin typeface="Verdana"/>
-              </a:rPr>
-              <a:t>A reading dropped in the race does not crash anything; the fleet averages are just silently wrong. And locking every insert fixes the race only by making ten senders queue behind each other.</a:t>
-            </a:r>
-          </a:p>
-          <a:p>
-            <a:pPr>
-              <a:spcAft>
-                <a:spcPts val="900"/>
-              </a:spcAft>
-            </a:pPr>
-            <a:r>
-              <a:rPr sz="1700" b="1">
-                <a:solidFill>
-                  <a:srgbClr val="1F8A8F"/>
-                </a:solidFill>
-                <a:latin typeface="Verdana"/>
-              </a:rPr>
-              <a:t>The fix:</a:t>
-            </a:r>
-          </a:p>
-          <a:p>
-            <a:pPr lvl="1">
-              <a:spcAft>
-                <a:spcPts val="900"/>
-              </a:spcAft>
-            </a:pPr>
-            <a:r>
-              <a:rPr sz="1500" b="0">
-                <a:solidFill>
-                  <a:srgbClr val="232A26"/>
-                </a:solidFill>
-                <a:latin typeface="Verdana"/>
-              </a:rPr>
-              <a:t>Make ingest lock-free: each arriving reading is a single atomic enqueue, nothing else. All grouping by depot and sensor type is deferred to a one-thread drain at flush time.</a:t>
-            </a:r>
-          </a:p>
-          <a:p>
-            <a:pPr>
-              <a:spcAft>
-                <a:spcPts val="900"/>
-              </a:spcAft>
-            </a:pPr>
-            <a:r>
-              <a:rPr sz="1700" b="0">
-                <a:solidFill>
-                  <a:srgbClr val="232A26"/>
-                </a:solidFill>
-                <a:latin typeface="Verdana"/>
-              </a:rPr>
-              <a:t>Proven, not hoped: an automated stress test hammers the intake with 32 concurrent threads writing 200 readings each, and after the drain every one of the 6,400 readings is accounted for, with zero lost.</a:t>
-            </a:r>
-          </a:p>
-        </p:txBody>
-      </p:sp>
-      <p:sp>
-        <p:nvSpPr>
           <p:cNvPr id="5" name="Rectangle 4"/>
           <p:cNvSpPr/>
           <p:nvPr/>
         </p:nvSpPr>
         <p:spPr>
           <a:xfrm>
-            <a:off x="658368" y="1261872"/>
-            <a:ext cx="3108960" cy="36576"/>
+            <a:off x="658368" y="6355080"/>
+            <a:ext cx="2743200" cy="36576"/>
           </a:xfrm>
           <a:prstGeom prst="rect">
             <a:avLst/>
           </a:prstGeom>
           <a:solidFill>
-            <a:srgbClr val="1F8A8F"/>
+            <a:srgbClr val="1F7A5A"/>
           </a:solidFill>
           <a:ln>
             <a:noFill/>
@@ -4390,20 +4390,140 @@
       <p:grpSpPr/>
       <p:sp>
         <p:nvSpPr>
+          <p:cNvPr id="2" name="Title 1"/>
+          <p:cNvSpPr>
+            <a:spLocks noGrp="1"/>
+          </p:cNvSpPr>
+          <p:nvPr>
+            <p:ph type="title"/>
+          </p:nvPr>
+        </p:nvSpPr>
+        <p:spPr>
+          <a:xfrm>
+            <a:off x="640080" y="411480"/>
+            <a:ext cx="10972800" cy="822960"/>
+          </a:xfrm>
+        </p:spPr>
+        <p:txBody>
+          <a:bodyPr wrap="square" anchor="t"/>
+          <a:lstStyle/>
+          <a:p>
+            <a:pPr algn="l"/>
+            <a:r>
+              <a:rPr b="1" sz="2700">
+                <a:solidFill>
+                  <a:srgbClr val="232A26"/>
+                </a:solidFill>
+                <a:latin typeface="Century Gothic"/>
+              </a:rPr>
+              <a:t>Takeaways</a:t>
+            </a:r>
+          </a:p>
+        </p:txBody>
+      </p:sp>
+      <p:sp>
+        <p:nvSpPr>
+          <p:cNvPr id="3" name="Content Placeholder 2"/>
+          <p:cNvSpPr>
+            <a:spLocks noGrp="1"/>
+          </p:cNvSpPr>
+          <p:nvPr>
+            <p:ph idx="1"/>
+          </p:nvPr>
+        </p:nvSpPr>
+        <p:spPr>
+          <a:xfrm>
+            <a:off x="658368" y="1463040"/>
+            <a:ext cx="10972800" cy="4663440"/>
+          </a:xfrm>
+        </p:spPr>
+        <p:txBody>
+          <a:bodyPr wrap="square">
+            <a:normAutofit/>
+          </a:bodyPr>
+          <a:lstStyle/>
+          <a:p>
+            <a:pPr>
+              <a:spcAft>
+                <a:spcPts val="900"/>
+              </a:spcAft>
+            </a:pPr>
+            <a:r>
+              <a:rPr sz="1700" b="0">
+                <a:solidFill>
+                  <a:srgbClr val="232A26"/>
+                </a:solidFill>
+                <a:latin typeface="Calibri"/>
+              </a:rPr>
+              <a:t>Intelligence at the edge: the fog gateway windows, aggregates and alerts right next to the vehicles, while the cloud stores compact per-window summaries, not raw sensor noise.</a:t>
+            </a:r>
+          </a:p>
+          <a:p>
+            <a:pPr>
+              <a:spcAft>
+                <a:spcPts val="900"/>
+              </a:spcAft>
+            </a:pPr>
+            <a:r>
+              <a:rPr sz="1700" b="0">
+                <a:solidFill>
+                  <a:srgbClr val="232A26"/>
+                </a:solidFill>
+                <a:latin typeface="Calibri"/>
+              </a:rPr>
+              <a:t>Serverless where it scales: Amazon SQS, AWS Lambda and DynamoDB absorb the fleet's writes with no servers to size, patch or babysit.</a:t>
+            </a:r>
+          </a:p>
+          <a:p>
+            <a:pPr>
+              <a:spcAft>
+                <a:spcPts val="900"/>
+              </a:spcAft>
+            </a:pPr>
+            <a:r>
+              <a:rPr sz="1700" b="0">
+                <a:solidFill>
+                  <a:srgbClr val="232A26"/>
+                </a:solidFill>
+                <a:latin typeface="Calibri"/>
+              </a:rPr>
+              <a:t>Verified, then portable: 130 automated tests, an end-to-end verified pipeline, and a single scripted step from the local run to AWS.</a:t>
+            </a:r>
+          </a:p>
+          <a:p>
+            <a:pPr>
+              <a:spcAft>
+                <a:spcPts val="900"/>
+              </a:spcAft>
+            </a:pPr>
+            <a:r>
+              <a:rPr sz="1700" b="0">
+                <a:solidFill>
+                  <a:srgbClr val="232A26"/>
+                </a:solidFill>
+                <a:latin typeface="Calibri"/>
+              </a:rPr>
+              <a:t>Thank you. Questions?</a:t>
+            </a:r>
+          </a:p>
+        </p:txBody>
+      </p:sp>
+      <p:sp>
+        <p:nvSpPr>
           <p:cNvPr id="4" name="Rectangle 3"/>
           <p:cNvSpPr/>
           <p:nvPr/>
         </p:nvSpPr>
         <p:spPr>
           <a:xfrm>
-            <a:off x="-45720" y="-45720"/>
-            <a:ext cx="5486400" cy="6949440"/>
+            <a:off x="658368" y="1207008"/>
+            <a:ext cx="10881360" cy="45720"/>
           </a:xfrm>
           <a:prstGeom prst="rect">
             <a:avLst/>
           </a:prstGeom>
           <a:solidFill>
-            <a:srgbClr val="E4F0F1"/>
+            <a:srgbClr val="1F7A5A"/>
           </a:solidFill>
           <a:ln>
             <a:noFill/>
@@ -4434,140 +4554,20 @@
       </p:sp>
       <p:sp>
         <p:nvSpPr>
-          <p:cNvPr id="2" name="Title 1"/>
-          <p:cNvSpPr>
-            <a:spLocks noGrp="1"/>
-          </p:cNvSpPr>
-          <p:nvPr>
-            <p:ph type="title"/>
-          </p:nvPr>
-        </p:nvSpPr>
-        <p:spPr>
-          <a:xfrm>
-            <a:off x="640080" y="384048"/>
-            <a:ext cx="10972800" cy="868680"/>
-          </a:xfrm>
-        </p:spPr>
-        <p:txBody>
-          <a:bodyPr wrap="square" anchor="t"/>
-          <a:lstStyle/>
-          <a:p>
-            <a:pPr algn="l"/>
-            <a:r>
-              <a:rPr b="1" sz="2700">
-                <a:solidFill>
-                  <a:srgbClr val="1F8A8F"/>
-                </a:solidFill>
-                <a:latin typeface="Corbel"/>
-              </a:rPr>
-              <a:t>Takeaways</a:t>
-            </a:r>
-          </a:p>
-        </p:txBody>
-      </p:sp>
-      <p:sp>
-        <p:nvSpPr>
-          <p:cNvPr id="3" name="Content Placeholder 2"/>
-          <p:cNvSpPr>
-            <a:spLocks noGrp="1"/>
-          </p:cNvSpPr>
-          <p:nvPr>
-            <p:ph idx="1"/>
-          </p:nvPr>
-        </p:nvSpPr>
-        <p:spPr>
-          <a:xfrm>
-            <a:off x="658368" y="1481328"/>
-            <a:ext cx="10972800" cy="4846320"/>
-          </a:xfrm>
-        </p:spPr>
-        <p:txBody>
-          <a:bodyPr wrap="square">
-            <a:normAutofit/>
-          </a:bodyPr>
-          <a:lstStyle/>
-          <a:p>
-            <a:pPr>
-              <a:spcAft>
-                <a:spcPts val="900"/>
-              </a:spcAft>
-            </a:pPr>
-            <a:r>
-              <a:rPr sz="1700" b="0">
-                <a:solidFill>
-                  <a:srgbClr val="232A26"/>
-                </a:solidFill>
-                <a:latin typeface="Verdana"/>
-              </a:rPr>
-              <a:t>Intelligence at the edge: the fog gateway windows, aggregates and alerts right next to the vehicles, while the cloud stores compact per-window summaries, not raw sensor noise.</a:t>
-            </a:r>
-          </a:p>
-          <a:p>
-            <a:pPr>
-              <a:spcAft>
-                <a:spcPts val="900"/>
-              </a:spcAft>
-            </a:pPr>
-            <a:r>
-              <a:rPr sz="1700" b="0">
-                <a:solidFill>
-                  <a:srgbClr val="232A26"/>
-                </a:solidFill>
-                <a:latin typeface="Verdana"/>
-              </a:rPr>
-              <a:t>Serverless where it scales: Amazon SQS, AWS Lambda and DynamoDB absorb the fleet's writes with no servers to size, patch or babysit.</a:t>
-            </a:r>
-          </a:p>
-          <a:p>
-            <a:pPr>
-              <a:spcAft>
-                <a:spcPts val="900"/>
-              </a:spcAft>
-            </a:pPr>
-            <a:r>
-              <a:rPr sz="1700" b="1">
-                <a:solidFill>
-                  <a:srgbClr val="1F8A8F"/>
-                </a:solidFill>
-                <a:latin typeface="Verdana"/>
-              </a:rPr>
-              <a:t>Verified, then portable: 130 automated tests, an end-to-end verified pipeline, and a single scripted step from the local run to AWS.</a:t>
-            </a:r>
-          </a:p>
-          <a:p>
-            <a:pPr>
-              <a:spcAft>
-                <a:spcPts val="900"/>
-              </a:spcAft>
-            </a:pPr>
-            <a:r>
-              <a:rPr sz="1700" b="0">
-                <a:solidFill>
-                  <a:srgbClr val="232A26"/>
-                </a:solidFill>
-                <a:latin typeface="Verdana"/>
-              </a:rPr>
-              <a:t>Thank you. Questions?</a:t>
-            </a:r>
-          </a:p>
-        </p:txBody>
-      </p:sp>
-      <p:sp>
-        <p:nvSpPr>
           <p:cNvPr id="5" name="Rectangle 4"/>
           <p:cNvSpPr/>
           <p:nvPr/>
         </p:nvSpPr>
         <p:spPr>
           <a:xfrm>
-            <a:off x="658368" y="1261872"/>
-            <a:ext cx="3108960" cy="36576"/>
+            <a:off x="658368" y="6355080"/>
+            <a:ext cx="2743200" cy="36576"/>
           </a:xfrm>
           <a:prstGeom prst="rect">
             <a:avLst/>
           </a:prstGeom>
           <a:solidFill>
-            <a:srgbClr val="1F8A8F"/>
+            <a:srgbClr val="1F7A5A"/>
           </a:solidFill>
           <a:ln>
             <a:noFill/>
